--- a/public/templates/traction-heavy.pptx
+++ b/public/templates/traction-heavy.pptx
@@ -17,10 +17,9 @@
     <p:sldId id="265" r:id="rId11"/>
     <p:sldId id="266" r:id="rId12"/>
     <p:sldId id="267" r:id="rId13"/>
-    <p:sldId id="268" r:id="rId14"/>
   </p:sldIdLst>
   <p:notesMasterIdLst>
-    <p:notesMasterId r:id="rId15"/>
+    <p:notesMasterId r:id="rId14"/>
   </p:notesMasterIdLst>
   <p:sldSz cx="9144000" cy="5143500"/>
   <p:notesSz cx="5143500" cy="9144000"/>
@@ -602,12 +601,7 @@
           <a:p>
             <a:r>
               <a:rPr lang="en-US" dirty="0"/>
-              <a:t>Instructions for "Business Model" slide:
-Revenue model
-Unit economics
-CAC/LTV ratio
-Payback period
-Replace this content with your own information.</a:t>
+              <a:t/>
             </a:r>
             <a:endParaRPr lang="en-US" dirty="0"/>
           </a:p>
@@ -695,12 +689,7 @@
           <a:p>
             <a:r>
               <a:rPr lang="en-US" dirty="0"/>
-              <a:t>Instructions for "Roadmap" slide:
-Product roadmap
-Expansion plans
-New revenue streams
-Geographic expansion
-Replace this content with your own information.</a:t>
+              <a:t/>
             </a:r>
             <a:endParaRPr lang="en-US" dirty="0"/>
           </a:p>
@@ -788,11 +777,7 @@
           <a:p>
             <a:r>
               <a:rPr lang="en-US" dirty="0"/>
-              <a:t>Instructions for "Team" slide:
-Founders and key hires
-Relevant experience
-Track record
-Replace this content with your own information.</a:t>
+              <a:t/>
             </a:r>
             <a:endParaRPr lang="en-US" dirty="0"/>
           </a:p>
@@ -816,99 +801,6 @@
             <a:fld id="{F7021451-1387-4CA6-816F-3879F97B5CBC}" type="slidenum">
               <a:rPr lang="en-US"/>
               <a:t>12</a:t>
-            </a:fld>
-            <a:endParaRPr lang="en-US"/>
-          </a:p>
-        </p:txBody>
-      </p:sp>
-    </p:spTree>
-    <p:extLst>
-      <p:ext uri="{BB962C8B-B14F-4D97-AF65-F5344CB8AC3E}">
-        <p14:creationId xmlns:p14="http://schemas.microsoft.com/office/powerpoint/2010/main" val="1024086991"/>
-      </p:ext>
-    </p:extLst>
-  </p:cSld>
-  <p:clrMapOvr>
-    <a:masterClrMapping/>
-  </p:clrMapOvr>
-</p:notes>
-</file>
-
-<file path=ppt/notesSlides/notesSlide13.xml><?xml version="1.0" encoding="utf-8"?>
-<p:notes xmlns:a="http://schemas.openxmlformats.org/drawingml/2006/main" xmlns:r="http://schemas.openxmlformats.org/officeDocument/2006/relationships" xmlns:p="http://schemas.openxmlformats.org/presentationml/2006/main">
-  <p:cSld>
-    <p:spTree>
-      <p:nvGrpSpPr>
-        <p:cNvPr id="1" name=""/>
-        <p:cNvGrpSpPr/>
-        <p:nvPr/>
-      </p:nvGrpSpPr>
-      <p:grpSpPr>
-        <a:xfrm>
-          <a:off x="0" y="0"/>
-          <a:ext cx="0" cy="0"/>
-          <a:chOff x="0" y="0"/>
-          <a:chExt cx="0" cy="0"/>
-        </a:xfrm>
-      </p:grpSpPr>
-      <p:sp>
-        <p:nvSpPr>
-          <p:cNvPr id="2" name="Slide Image Placeholder 1"/>
-          <p:cNvSpPr>
-            <a:spLocks noGrp="1" noRot="1" noChangeAspect="1"/>
-          </p:cNvSpPr>
-          <p:nvPr>
-            <p:ph type="sldImg"/>
-          </p:nvPr>
-        </p:nvSpPr>
-        <p:spPr/>
-      </p:sp>
-      <p:sp>
-        <p:nvSpPr>
-          <p:cNvPr id="3" name="Notes Placeholder 2"/>
-          <p:cNvSpPr>
-            <a:spLocks noGrp="1"/>
-          </p:cNvSpPr>
-          <p:nvPr>
-            <p:ph type="body" idx="1"/>
-          </p:nvPr>
-        </p:nvSpPr>
-        <p:spPr/>
-        <p:txBody>
-          <a:bodyPr/>
-          <a:lstStyle/>
-          <a:p>
-            <a:r>
-              <a:rPr lang="en-US" dirty="0"/>
-              <a:t>Instructions for "Ask &amp; Use of Funds" slide:
-Round size
-Use of funds
-Milestones with funding
-Timeline to next milestone
-Replace this content with your own information.</a:t>
-            </a:r>
-            <a:endParaRPr lang="en-US" dirty="0"/>
-          </a:p>
-        </p:txBody>
-      </p:sp>
-      <p:sp>
-        <p:nvSpPr>
-          <p:cNvPr id="4" name="Slide Number Placeholder 3"/>
-          <p:cNvSpPr>
-            <a:spLocks noGrp="1"/>
-          </p:cNvSpPr>
-          <p:nvPr>
-            <p:ph type="sldNum" sz="quarter" idx="10"/>
-          </p:nvPr>
-        </p:nvSpPr>
-        <p:spPr/>
-        <p:txBody>
-          <a:bodyPr/>
-          <a:lstStyle/>
-          <a:p>
-            <a:fld id="{F7021451-1387-4CA6-816F-3879F97B5CBC}" type="slidenum">
-              <a:rPr lang="en-US"/>
-              <a:t>13</a:t>
             </a:fld>
             <a:endParaRPr lang="en-US"/>
           </a:p>
@@ -973,11 +865,7 @@
           <a:p>
             <a:r>
               <a:rPr lang="en-US" dirty="0"/>
-              <a:t>Instructions for "Cover Slide" slide:
-Company name and logo
-Tagline
-Contact information
-Replace this content with your own information.</a:t>
+              <a:t/>
             </a:r>
             <a:endParaRPr lang="en-US" dirty="0"/>
           </a:p>
@@ -1065,12 +953,7 @@
           <a:p>
             <a:r>
               <a:rPr lang="en-US" dirty="0"/>
-              <a:t>Instructions for "Traction Highlight" slide:
-Most impressive growth metric
-Revenue number or user count
-Growth rate (MoM/YoY)
-Comparative context
-Replace this content with your own information.</a:t>
+              <a:t/>
             </a:r>
             <a:endParaRPr lang="en-US" dirty="0"/>
           </a:p>
@@ -1158,11 +1041,7 @@
           <a:p>
             <a:r>
               <a:rPr lang="en-US" dirty="0"/>
-              <a:t>Instructions for "Problem" slide:
-The pain point
-Market validation of problem
-Current broken solutions
-Replace this content with your own information.</a:t>
+              <a:t/>
             </a:r>
             <a:endParaRPr lang="en-US" dirty="0"/>
           </a:p>
@@ -1250,11 +1129,7 @@
           <a:p>
             <a:r>
               <a:rPr lang="en-US" dirty="0"/>
-              <a:t>Instructions for "Solution" slide:
-How you solve it differently
-Core product functionality
-Key innovation
-Replace this content with your own information.</a:t>
+              <a:t/>
             </a:r>
             <a:endParaRPr lang="en-US" dirty="0"/>
           </a:p>
@@ -1342,13 +1217,7 @@
           <a:p>
             <a:r>
               <a:rPr lang="en-US" dirty="0"/>
-              <a:t>Instructions for "Detailed Metrics" slide:
-Revenue metrics
-User metrics
-Engagement metrics
-Retention metrics
-Growth trajectory
-Replace this content with your own information.</a:t>
+              <a:t/>
             </a:r>
             <a:endParaRPr lang="en-US" dirty="0"/>
           </a:p>
@@ -1436,12 +1305,7 @@
           <a:p>
             <a:r>
               <a:rPr lang="en-US" dirty="0"/>
-              <a:t>Instructions for "Customer Proof" slide:
-Customer logos
-Case studies
-Testimonials
-Usage statistics
-Replace this content with your own information.</a:t>
+              <a:t/>
             </a:r>
             <a:endParaRPr lang="en-US" dirty="0"/>
           </a:p>
@@ -1529,11 +1393,7 @@
           <a:p>
             <a:r>
               <a:rPr lang="en-US" dirty="0"/>
-              <a:t>Instructions for "Market" slide:
-TAM/SAM/SOM
-Market trends
-Growth drivers
-Replace this content with your own information.</a:t>
+              <a:t/>
             </a:r>
             <a:endParaRPr lang="en-US" dirty="0"/>
           </a:p>
@@ -1621,11 +1481,7 @@
           <a:p>
             <a:r>
               <a:rPr lang="en-US" dirty="0"/>
-              <a:t>Instructions for "Product Deep Dive" slide:
-Product walkthrough
-Key features
-Technology moat
-Replace this content with your own information.</a:t>
+              <a:t/>
             </a:r>
             <a:endParaRPr lang="en-US" dirty="0"/>
           </a:p>
@@ -1697,74 +1553,6 @@
 </p:sldLayout>
 </file>
 
-<file path=ppt/slideLayouts/slideLayout2.xml><?xml version="1.0" encoding="utf-8"?>
-<p:sldLayout xmlns:a="http://schemas.openxmlformats.org/drawingml/2006/main" xmlns:r="http://schemas.openxmlformats.org/officeDocument/2006/relationships" xmlns:p="http://schemas.openxmlformats.org/presentationml/2006/main" preserve="1">
-  <p:cSld name="MASTER_SLIDE">
-    <p:bg>
-      <p:bgPr>
-        <a:solidFill>
-          <a:srgbClr val="FFFFFF"/>
-        </a:solidFill>
-      </p:bgPr>
-    </p:bg>
-    <p:spTree>
-      <p:nvGrpSpPr>
-        <p:cNvPr id="1" name=""/>
-        <p:cNvGrpSpPr/>
-        <p:nvPr/>
-      </p:nvGrpSpPr>
-      <p:grpSpPr>
-        <a:xfrm>
-          <a:off x="0" y="0"/>
-          <a:ext cx="0" cy="0"/>
-          <a:chOff x="0" y="0"/>
-          <a:chExt cx="0" cy="0"/>
-        </a:xfrm>
-      </p:grpSpPr>
-      <p:sp>
-        <p:nvSpPr>
-          <p:cNvPr id="2" name="Text 0"/>
-          <p:cNvSpPr/>
-          <p:nvPr/>
-        </p:nvSpPr>
-        <p:spPr>
-          <a:xfrm>
-            <a:off x="457200" y="6217920"/>
-            <a:ext cx="8229600" cy="274320"/>
-          </a:xfrm>
-          <a:prstGeom prst="rect">
-            <a:avLst/>
-          </a:prstGeom>
-          <a:noFill/>
-          <a:ln/>
-        </p:spPr>
-        <p:txBody>
-          <a:bodyPr wrap="square" rtlCol="0" anchor="ctr"/>
-          <a:lstStyle/>
-          <a:p>
-            <a:pPr algn="r" indent="0" marL="0">
-              <a:buNone/>
-            </a:pPr>
-            <a:r>
-              <a:rPr lang="en-US" sz="1000" dirty="0">
-                <a:solidFill>
-                  <a:srgbClr val="666666"/>
-                </a:solidFill>
-              </a:rPr>
-              <a:t>Creatives Takeover</a:t>
-            </a:r>
-            <a:endParaRPr lang="en-US" sz="1000" dirty="0"/>
-          </a:p>
-        </p:txBody>
-      </p:sp>
-    </p:spTree>
-  </p:cSld>
-  <p:clrMapOvr>
-    <a:masterClrMapping/>
-  </p:clrMapOvr>
-</p:sldLayout>
-</file>
-
 <file path=ppt/slideMasters/slideMaster1.xml><?xml version="1.0" encoding="utf-8"?>
 <p:sldMaster xmlns:a="http://schemas.openxmlformats.org/drawingml/2006/main" xmlns:r="http://schemas.openxmlformats.org/officeDocument/2006/relationships" xmlns:p="http://schemas.openxmlformats.org/presentationml/2006/main">
   <p:cSld>
@@ -1787,7 +1575,6 @@
   <p:clrMap bg1="lt1" tx1="dk1" bg2="lt2" tx2="dk2" accent1="accent1" accent2="accent2" accent3="accent3" accent4="accent4" accent5="accent5" accent6="accent6" hlink="hlink" folHlink="folHlink"/>
   <p:sldLayoutIdLst>
     <p:sldLayoutId id="2147483649" r:id="rId1"/>
-    <p:sldLayoutId id="2147483650" r:id="rId2"/>
   </p:sldLayoutIdLst>
   <p:hf sldNum="0" hdr="0" ftr="0" dt="0"/>
   <p:txStyles>
@@ -2076,7 +1863,7 @@
         <p:spPr>
           <a:xfrm>
             <a:off x="457200" y="2286000"/>
-            <a:ext cx="8229600" cy="1371600"/>
+            <a:ext cx="8229600" cy="1097280"/>
           </a:xfrm>
           <a:prstGeom prst="rect">
             <a:avLst/>
@@ -2092,14 +1879,17 @@
               <a:buNone/>
             </a:pPr>
             <a:r>
-              <a:rPr lang="en-US" sz="4400" b="1" dirty="0">
+              <a:rPr lang="en-US" sz="4800" b="1" dirty="0">
                 <a:solidFill>
                   <a:srgbClr val="FFFFFF"/>
                 </a:solidFill>
-              </a:rPr>
-              <a:t>Traction-Heavy Deck</a:t>
-            </a:r>
-            <a:endParaRPr lang="en-US" sz="4400" dirty="0"/>
+                <a:latin typeface="Calibri" pitchFamily="34" charset="0"/>
+                <a:ea typeface="Calibri" pitchFamily="34" charset="-122"/>
+                <a:cs typeface="Calibri" pitchFamily="34" charset="-120"/>
+              </a:rPr>
+              <a:t>Your Company Name</a:t>
+            </a:r>
+            <a:endParaRPr lang="en-US" sz="4800" dirty="0"/>
           </a:p>
         </p:txBody>
       </p:sp>
@@ -2111,8 +1901,8 @@
         </p:nvSpPr>
         <p:spPr>
           <a:xfrm>
-            <a:off x="457200" y="3657600"/>
-            <a:ext cx="8229600" cy="457200"/>
+            <a:off x="457200" y="3474720"/>
+            <a:ext cx="8229600" cy="548640"/>
           </a:xfrm>
           <a:prstGeom prst="rect">
             <a:avLst/>
@@ -2128,50 +1918,17 @@
               <a:buNone/>
             </a:pPr>
             <a:r>
-              <a:rPr lang="en-US" sz="2000" dirty="0">
+              <a:rPr lang="en-US" sz="2400" dirty="0">
                 <a:solidFill>
                   <a:srgbClr val="38BDF8"/>
                 </a:solidFill>
-              </a:rPr>
-              <a:t>Editable Template</a:t>
-            </a:r>
-            <a:endParaRPr lang="en-US" sz="2000" dirty="0"/>
-          </a:p>
-        </p:txBody>
-      </p:sp>
-      <p:sp>
-        <p:nvSpPr>
-          <p:cNvPr id="4" name="Text 2"/>
-          <p:cNvSpPr/>
-          <p:nvPr/>
-        </p:nvSpPr>
-        <p:spPr>
-          <a:xfrm>
-            <a:off x="457200" y="4297680"/>
-            <a:ext cx="8229600" cy="274320"/>
-          </a:xfrm>
-          <a:prstGeom prst="rect">
-            <a:avLst/>
-          </a:prstGeom>
-          <a:noFill/>
-          <a:ln/>
-        </p:spPr>
-        <p:txBody>
-          <a:bodyPr wrap="square" rtlCol="0" anchor="ctr"/>
-          <a:lstStyle/>
-          <a:p>
-            <a:pPr algn="ctr" indent="0" marL="0">
-              <a:buNone/>
-            </a:pPr>
-            <a:r>
-              <a:rPr lang="en-US" sz="1400" dirty="0">
-                <a:solidFill>
-                  <a:srgbClr val="CCCCCC"/>
-                </a:solidFill>
-              </a:rPr>
-              <a:t>Created by Creatives Takeover</a:t>
-            </a:r>
-            <a:endParaRPr lang="en-US" sz="1400" dirty="0"/>
+                <a:latin typeface="Calibri" pitchFamily="34" charset="0"/>
+                <a:ea typeface="Calibri" pitchFamily="34" charset="-122"/>
+                <a:cs typeface="Calibri" pitchFamily="34" charset="-120"/>
+              </a:rPr>
+              <a:t>Lead with your strongest metrics</a:t>
+            </a:r>
+            <a:endParaRPr lang="en-US" sz="2400" dirty="0"/>
           </a:p>
         </p:txBody>
       </p:sp>
@@ -2186,6 +1943,13 @@
 <file path=ppt/slides/slide10.xml><?xml version="1.0" encoding="utf-8"?>
 <p:sld xmlns:a="http://schemas.openxmlformats.org/drawingml/2006/main" xmlns:r="http://schemas.openxmlformats.org/officeDocument/2006/relationships" xmlns:p="http://schemas.openxmlformats.org/presentationml/2006/main">
   <p:cSld name="Slide 10">
+    <p:bg>
+      <p:bgPr>
+        <a:solidFill>
+          <a:srgbClr val="FFFFFF"/>
+        </a:solidFill>
+      </p:bgPr>
+    </p:bg>
     <p:spTree>
       <p:nvGrpSpPr>
         <p:cNvPr id="1" name=""/>
@@ -2202,14 +1966,34 @@
       </p:grpSpPr>
       <p:sp>
         <p:nvSpPr>
-          <p:cNvPr id="2" name="Text 0"/>
-          <p:cNvSpPr/>
-          <p:nvPr/>
-        </p:nvSpPr>
-        <p:spPr>
-          <a:xfrm>
-            <a:off x="457200" y="457200"/>
-            <a:ext cx="8229600" cy="685800"/>
+          <p:cNvPr id="2" name="Shape 0"/>
+          <p:cNvSpPr/>
+          <p:nvPr/>
+        </p:nvSpPr>
+        <p:spPr>
+          <a:xfrm>
+            <a:off x="0" y="0"/>
+            <a:ext cx="9144000" cy="137160"/>
+          </a:xfrm>
+          <a:prstGeom prst="rect">
+            <a:avLst/>
+          </a:prstGeom>
+          <a:solidFill>
+            <a:srgbClr val="0B1437"/>
+          </a:solidFill>
+          <a:ln/>
+        </p:spPr>
+      </p:sp>
+      <p:sp>
+        <p:nvSpPr>
+          <p:cNvPr id="3" name="Text 1"/>
+          <p:cNvSpPr/>
+          <p:nvPr/>
+        </p:nvSpPr>
+        <p:spPr>
+          <a:xfrm>
+            <a:off x="457200" y="365760"/>
+            <a:ext cx="8229600" cy="548640"/>
           </a:xfrm>
           <a:prstGeom prst="rect">
             <a:avLst/>
@@ -2229,8 +2013,11 @@
                 <a:solidFill>
                   <a:srgbClr val="0B1437"/>
                 </a:solidFill>
-              </a:rPr>
-              <a:t>Business Model</a:t>
+                <a:latin typeface="Calibri" pitchFamily="34" charset="0"/>
+                <a:ea typeface="Calibri" pitchFamily="34" charset="-122"/>
+                <a:cs typeface="Calibri" pitchFamily="34" charset="-120"/>
+              </a:rPr>
+              <a:t>The Team</a:t>
             </a:r>
             <a:endParaRPr lang="en-US" sz="3200" dirty="0"/>
           </a:p>
@@ -2238,7 +2025,46 @@
       </p:sp>
       <p:sp>
         <p:nvSpPr>
-          <p:cNvPr id="3" name="Text 1"/>
+          <p:cNvPr id="4" name="Text 2"/>
+          <p:cNvSpPr/>
+          <p:nvPr/>
+        </p:nvSpPr>
+        <p:spPr>
+          <a:xfrm>
+            <a:off x="457200" y="914400"/>
+            <a:ext cx="8229600" cy="365760"/>
+          </a:xfrm>
+          <a:prstGeom prst="rect">
+            <a:avLst/>
+          </a:prstGeom>
+          <a:noFill/>
+          <a:ln/>
+        </p:spPr>
+        <p:txBody>
+          <a:bodyPr wrap="square" rtlCol="0" anchor="ctr"/>
+          <a:lstStyle/>
+          <a:p>
+            <a:pPr indent="0" marL="0">
+              <a:buNone/>
+            </a:pPr>
+            <a:r>
+              <a:rPr lang="en-US" sz="1600" i="1" dirty="0">
+                <a:solidFill>
+                  <a:srgbClr val="6B7280"/>
+                </a:solidFill>
+                <a:latin typeface="Calibri" pitchFamily="34" charset="0"/>
+                <a:ea typeface="Calibri" pitchFamily="34" charset="-122"/>
+                <a:cs typeface="Calibri" pitchFamily="34" charset="-120"/>
+              </a:rPr>
+              <a:t>Domain expertise</a:t>
+            </a:r>
+            <a:endParaRPr lang="en-US" sz="1600" dirty="0"/>
+          </a:p>
+        </p:txBody>
+      </p:sp>
+      <p:sp>
+        <p:nvSpPr>
+          <p:cNvPr id="5" name="Text 3"/>
           <p:cNvSpPr/>
           <p:nvPr/>
         </p:nvSpPr>
@@ -2265,14 +2091,17 @@
               <a:buChar char="•"/>
             </a:pPr>
             <a:r>
-              <a:rPr lang="en-US" sz="1600" dirty="0">
-                <a:solidFill>
-                  <a:srgbClr val="374151"/>
-                </a:solidFill>
-              </a:rPr>
-              <a:t>Revenue model</a:t>
-            </a:r>
-            <a:endParaRPr lang="en-US" sz="1600" dirty="0"/>
+              <a:rPr lang="en-US" sz="1800" b="1" dirty="0">
+                <a:solidFill>
+                  <a:srgbClr val="1F2937"/>
+                </a:solidFill>
+                <a:latin typeface="Calibri" pitchFamily="34" charset="0"/>
+                <a:ea typeface="Calibri" pitchFamily="34" charset="-122"/>
+                <a:cs typeface="Calibri" pitchFamily="34" charset="-120"/>
+              </a:rPr>
+              <a:t>CEO: Ex-Google PM, sold previous fintech startup for $20M</a:t>
+            </a:r>
+            <a:endParaRPr lang="en-US" sz="1800" dirty="0"/>
           </a:p>
           <a:p>
             <a:pPr marL="342900" indent="-342900">
@@ -2283,14 +2112,17 @@
               <a:buChar char="•"/>
             </a:pPr>
             <a:r>
-              <a:rPr lang="en-US" sz="1600" dirty="0">
-                <a:solidFill>
-                  <a:srgbClr val="374151"/>
-                </a:solidFill>
-              </a:rPr>
-              <a:t>Unit economics</a:t>
-            </a:r>
-            <a:endParaRPr lang="en-US" sz="1600" dirty="0"/>
+              <a:rPr lang="en-US" sz="1800" b="1" dirty="0">
+                <a:solidFill>
+                  <a:srgbClr val="1F2937"/>
+                </a:solidFill>
+                <a:latin typeface="Calibri" pitchFamily="34" charset="0"/>
+                <a:ea typeface="Calibri" pitchFamily="34" charset="-122"/>
+                <a:cs typeface="Calibri" pitchFamily="34" charset="-120"/>
+              </a:rPr>
+              <a:t>CTO: Former Stripe engineer, MIT CS, payments expert</a:t>
+            </a:r>
+            <a:endParaRPr lang="en-US" sz="1800" dirty="0"/>
           </a:p>
           <a:p>
             <a:pPr marL="342900" indent="-342900">
@@ -2301,14 +2133,17 @@
               <a:buChar char="•"/>
             </a:pPr>
             <a:r>
-              <a:rPr lang="en-US" sz="1600" dirty="0">
-                <a:solidFill>
-                  <a:srgbClr val="374151"/>
-                </a:solidFill>
-              </a:rPr>
-              <a:t>CAC/LTV ratio</a:t>
-            </a:r>
-            <a:endParaRPr lang="en-US" sz="1600" dirty="0"/>
+              <a:rPr lang="en-US" sz="1800" b="1" dirty="0">
+                <a:solidFill>
+                  <a:srgbClr val="1F2937"/>
+                </a:solidFill>
+                <a:latin typeface="Calibri" pitchFamily="34" charset="0"/>
+                <a:ea typeface="Calibri" pitchFamily="34" charset="-122"/>
+                <a:cs typeface="Calibri" pitchFamily="34" charset="-120"/>
+              </a:rPr>
+              <a:t>VP Sales: Scaled SaaS teams at Salesforce and HubSpot</a:t>
+            </a:r>
+            <a:endParaRPr lang="en-US" sz="1800" dirty="0"/>
           </a:p>
           <a:p>
             <a:pPr marL="342900" indent="-342900">
@@ -2319,14 +2154,115 @@
               <a:buChar char="•"/>
             </a:pPr>
             <a:r>
-              <a:rPr lang="en-US" sz="1600" dirty="0">
-                <a:solidFill>
-                  <a:srgbClr val="374151"/>
-                </a:solidFill>
-              </a:rPr>
-              <a:t>Payback period</a:t>
-            </a:r>
-            <a:endParaRPr lang="en-US" sz="1600" dirty="0"/>
+              <a:rPr lang="en-US" sz="1800" b="1" dirty="0">
+                <a:solidFill>
+                  <a:srgbClr val="1F2937"/>
+                </a:solidFill>
+                <a:latin typeface="Calibri" pitchFamily="34" charset="0"/>
+                <a:ea typeface="Calibri" pitchFamily="34" charset="-122"/>
+                <a:cs typeface="Calibri" pitchFamily="34" charset="-120"/>
+              </a:rPr>
+              <a:t>Advisors: Former CFO of Square, Partner at Sequoia</a:t>
+            </a:r>
+            <a:endParaRPr lang="en-US" sz="1800" dirty="0"/>
+          </a:p>
+        </p:txBody>
+      </p:sp>
+      <p:sp>
+        <p:nvSpPr>
+          <p:cNvPr id="6" name="Shape 4"/>
+          <p:cNvSpPr/>
+          <p:nvPr/>
+        </p:nvSpPr>
+        <p:spPr>
+          <a:xfrm>
+            <a:off x="0" y="6720840"/>
+            <a:ext cx="73152" cy="137160"/>
+          </a:xfrm>
+          <a:prstGeom prst="rect">
+            <a:avLst/>
+          </a:prstGeom>
+          <a:solidFill>
+            <a:srgbClr val="38BDF8"/>
+          </a:solidFill>
+          <a:ln/>
+        </p:spPr>
+      </p:sp>
+      <p:sp>
+        <p:nvSpPr>
+          <p:cNvPr id="7" name="Text 5"/>
+          <p:cNvSpPr/>
+          <p:nvPr/>
+        </p:nvSpPr>
+        <p:spPr>
+          <a:xfrm>
+            <a:off x="274320" y="6720840"/>
+            <a:ext cx="2743200" cy="137160"/>
+          </a:xfrm>
+          <a:prstGeom prst="rect">
+            <a:avLst/>
+          </a:prstGeom>
+          <a:noFill/>
+          <a:ln/>
+        </p:spPr>
+        <p:txBody>
+          <a:bodyPr wrap="square" rtlCol="0" anchor="ctr"/>
+          <a:lstStyle/>
+          <a:p>
+            <a:pPr indent="0" marL="0">
+              <a:buNone/>
+            </a:pPr>
+            <a:r>
+              <a:rPr lang="en-US" sz="1000" dirty="0">
+                <a:solidFill>
+                  <a:srgbClr val="6B7280"/>
+                </a:solidFill>
+                <a:latin typeface="Calibri" pitchFamily="34" charset="0"/>
+                <a:ea typeface="Calibri" pitchFamily="34" charset="-122"/>
+                <a:cs typeface="Calibri" pitchFamily="34" charset="-120"/>
+              </a:rPr>
+              <a:t>Creatives Takeover</a:t>
+            </a:r>
+            <a:endParaRPr lang="en-US" sz="1000" dirty="0"/>
+          </a:p>
+        </p:txBody>
+      </p:sp>
+      <p:sp>
+        <p:nvSpPr>
+          <p:cNvPr id="8" name="Text 6"/>
+          <p:cNvSpPr/>
+          <p:nvPr/>
+        </p:nvSpPr>
+        <p:spPr>
+          <a:xfrm>
+            <a:off x="8412480" y="6720840"/>
+            <a:ext cx="274320" cy="137160"/>
+          </a:xfrm>
+          <a:prstGeom prst="rect">
+            <a:avLst/>
+          </a:prstGeom>
+          <a:noFill/>
+          <a:ln/>
+        </p:spPr>
+        <p:txBody>
+          <a:bodyPr wrap="square" rtlCol="0" anchor="ctr"/>
+          <a:lstStyle/>
+          <a:p>
+            <a:pPr algn="r" indent="0" marL="0">
+              <a:buNone/>
+            </a:pPr>
+            <a:r>
+              <a:rPr lang="en-US" sz="1000" dirty="0">
+                <a:solidFill>
+                  <a:srgbClr val="6B7280"/>
+                </a:solidFill>
+                <a:latin typeface="Calibri" pitchFamily="34" charset="0"/>
+                <a:ea typeface="Calibri" pitchFamily="34" charset="-122"/>
+                <a:cs typeface="Calibri" pitchFamily="34" charset="-120"/>
+              </a:rPr>
+              <a:t>10</a:t>
+            </a:r>
+            <a:endParaRPr lang="en-US" sz="1000" dirty="0"/>
           </a:p>
         </p:txBody>
       </p:sp>
@@ -2341,6 +2277,13 @@
 <file path=ppt/slides/slide11.xml><?xml version="1.0" encoding="utf-8"?>
 <p:sld xmlns:a="http://schemas.openxmlformats.org/drawingml/2006/main" xmlns:r="http://schemas.openxmlformats.org/officeDocument/2006/relationships" xmlns:p="http://schemas.openxmlformats.org/presentationml/2006/main">
   <p:cSld name="Slide 11">
+    <p:bg>
+      <p:bgPr>
+        <a:solidFill>
+          <a:srgbClr val="FFFFFF"/>
+        </a:solidFill>
+      </p:bgPr>
+    </p:bg>
     <p:spTree>
       <p:nvGrpSpPr>
         <p:cNvPr id="1" name=""/>
@@ -2357,14 +2300,34 @@
       </p:grpSpPr>
       <p:sp>
         <p:nvSpPr>
-          <p:cNvPr id="2" name="Text 0"/>
-          <p:cNvSpPr/>
-          <p:nvPr/>
-        </p:nvSpPr>
-        <p:spPr>
-          <a:xfrm>
-            <a:off x="457200" y="457200"/>
-            <a:ext cx="8229600" cy="685800"/>
+          <p:cNvPr id="2" name="Shape 0"/>
+          <p:cNvSpPr/>
+          <p:nvPr/>
+        </p:nvSpPr>
+        <p:spPr>
+          <a:xfrm>
+            <a:off x="0" y="0"/>
+            <a:ext cx="9144000" cy="137160"/>
+          </a:xfrm>
+          <a:prstGeom prst="rect">
+            <a:avLst/>
+          </a:prstGeom>
+          <a:solidFill>
+            <a:srgbClr val="0B1437"/>
+          </a:solidFill>
+          <a:ln/>
+        </p:spPr>
+      </p:sp>
+      <p:sp>
+        <p:nvSpPr>
+          <p:cNvPr id="3" name="Text 1"/>
+          <p:cNvSpPr/>
+          <p:nvPr/>
+        </p:nvSpPr>
+        <p:spPr>
+          <a:xfrm>
+            <a:off x="457200" y="365760"/>
+            <a:ext cx="8229600" cy="548640"/>
           </a:xfrm>
           <a:prstGeom prst="rect">
             <a:avLst/>
@@ -2384,6 +2347,9 @@
                 <a:solidFill>
                   <a:srgbClr val="0B1437"/>
                 </a:solidFill>
+                <a:latin typeface="Calibri" pitchFamily="34" charset="0"/>
+                <a:ea typeface="Calibri" pitchFamily="34" charset="-122"/>
+                <a:cs typeface="Calibri" pitchFamily="34" charset="-120"/>
               </a:rPr>
               <a:t>Roadmap</a:t>
             </a:r>
@@ -2393,7 +2359,46 @@
       </p:sp>
       <p:sp>
         <p:nvSpPr>
-          <p:cNvPr id="3" name="Text 1"/>
+          <p:cNvPr id="4" name="Text 2"/>
+          <p:cNvSpPr/>
+          <p:nvPr/>
+        </p:nvSpPr>
+        <p:spPr>
+          <a:xfrm>
+            <a:off x="457200" y="914400"/>
+            <a:ext cx="8229600" cy="365760"/>
+          </a:xfrm>
+          <a:prstGeom prst="rect">
+            <a:avLst/>
+          </a:prstGeom>
+          <a:noFill/>
+          <a:ln/>
+        </p:spPr>
+        <p:txBody>
+          <a:bodyPr wrap="square" rtlCol="0" anchor="ctr"/>
+          <a:lstStyle/>
+          <a:p>
+            <a:pPr indent="0" marL="0">
+              <a:buNone/>
+            </a:pPr>
+            <a:r>
+              <a:rPr lang="en-US" sz="1600" i="1" dirty="0">
+                <a:solidFill>
+                  <a:srgbClr val="6B7280"/>
+                </a:solidFill>
+                <a:latin typeface="Calibri" pitchFamily="34" charset="0"/>
+                <a:ea typeface="Calibri" pitchFamily="34" charset="-122"/>
+                <a:cs typeface="Calibri" pitchFamily="34" charset="-120"/>
+              </a:rPr>
+              <a:t>What's next</a:t>
+            </a:r>
+            <a:endParaRPr lang="en-US" sz="1600" dirty="0"/>
+          </a:p>
+        </p:txBody>
+      </p:sp>
+      <p:sp>
+        <p:nvSpPr>
+          <p:cNvPr id="5" name="Text 3"/>
           <p:cNvSpPr/>
           <p:nvPr/>
         </p:nvSpPr>
@@ -2420,14 +2425,17 @@
               <a:buChar char="•"/>
             </a:pPr>
             <a:r>
-              <a:rPr lang="en-US" sz="1600" dirty="0">
-                <a:solidFill>
-                  <a:srgbClr val="374151"/>
-                </a:solidFill>
-              </a:rPr>
-              <a:t>Product roadmap</a:t>
-            </a:r>
-            <a:endParaRPr lang="en-US" sz="1600" dirty="0"/>
+              <a:rPr lang="en-US" sz="1800" b="1" dirty="0">
+                <a:solidFill>
+                  <a:srgbClr val="1F2937"/>
+                </a:solidFill>
+                <a:latin typeface="Calibri" pitchFamily="34" charset="0"/>
+                <a:ea typeface="Calibri" pitchFamily="34" charset="-122"/>
+                <a:cs typeface="Calibri" pitchFamily="34" charset="-120"/>
+              </a:rPr>
+              <a:t>Q1: Launch enterprise tier for teams of 50+</a:t>
+            </a:r>
+            <a:endParaRPr lang="en-US" sz="1800" dirty="0"/>
           </a:p>
           <a:p>
             <a:pPr marL="342900" indent="-342900">
@@ -2438,14 +2446,17 @@
               <a:buChar char="•"/>
             </a:pPr>
             <a:r>
-              <a:rPr lang="en-US" sz="1600" dirty="0">
-                <a:solidFill>
-                  <a:srgbClr val="374151"/>
-                </a:solidFill>
-              </a:rPr>
-              <a:t>Expansion plans</a:t>
-            </a:r>
-            <a:endParaRPr lang="en-US" sz="1600" dirty="0"/>
+              <a:rPr lang="en-US" sz="1800" b="1" dirty="0">
+                <a:solidFill>
+                  <a:srgbClr val="1F2937"/>
+                </a:solidFill>
+                <a:latin typeface="Calibri" pitchFamily="34" charset="0"/>
+                <a:ea typeface="Calibri" pitchFamily="34" charset="-122"/>
+                <a:cs typeface="Calibri" pitchFamily="34" charset="-120"/>
+              </a:rPr>
+              <a:t>Q2: Expand integrations (QuickBooks, Xero, FreshBooks)</a:t>
+            </a:r>
+            <a:endParaRPr lang="en-US" sz="1800" dirty="0"/>
           </a:p>
           <a:p>
             <a:pPr marL="342900" indent="-342900">
@@ -2456,14 +2467,17 @@
               <a:buChar char="•"/>
             </a:pPr>
             <a:r>
-              <a:rPr lang="en-US" sz="1600" dirty="0">
-                <a:solidFill>
-                  <a:srgbClr val="374151"/>
-                </a:solidFill>
-              </a:rPr>
-              <a:t>New revenue streams</a:t>
-            </a:r>
-            <a:endParaRPr lang="en-US" sz="1600" dirty="0"/>
+              <a:rPr lang="en-US" sz="1800" b="1" dirty="0">
+                <a:solidFill>
+                  <a:srgbClr val="1F2937"/>
+                </a:solidFill>
+                <a:latin typeface="Calibri" pitchFamily="34" charset="0"/>
+                <a:ea typeface="Calibri" pitchFamily="34" charset="-122"/>
+                <a:cs typeface="Calibri" pitchFamily="34" charset="-120"/>
+              </a:rPr>
+              <a:t>Q3: International expansion (UK, Canada, Australia)</a:t>
+            </a:r>
+            <a:endParaRPr lang="en-US" sz="1800" dirty="0"/>
           </a:p>
           <a:p>
             <a:pPr marL="342900" indent="-342900">
@@ -2474,14 +2488,115 @@
               <a:buChar char="•"/>
             </a:pPr>
             <a:r>
-              <a:rPr lang="en-US" sz="1600" dirty="0">
-                <a:solidFill>
-                  <a:srgbClr val="374151"/>
-                </a:solidFill>
-              </a:rPr>
-              <a:t>Geographic expansion</a:t>
-            </a:r>
-            <a:endParaRPr lang="en-US" sz="1600" dirty="0"/>
+              <a:rPr lang="en-US" sz="1800" b="1" dirty="0">
+                <a:solidFill>
+                  <a:srgbClr val="1F2937"/>
+                </a:solidFill>
+                <a:latin typeface="Calibri" pitchFamily="34" charset="0"/>
+                <a:ea typeface="Calibri" pitchFamily="34" charset="-122"/>
+                <a:cs typeface="Calibri" pitchFamily="34" charset="-120"/>
+              </a:rPr>
+              <a:t>Q4: AI-powered cash flow forecasting</a:t>
+            </a:r>
+            <a:endParaRPr lang="en-US" sz="1800" dirty="0"/>
+          </a:p>
+        </p:txBody>
+      </p:sp>
+      <p:sp>
+        <p:nvSpPr>
+          <p:cNvPr id="6" name="Shape 4"/>
+          <p:cNvSpPr/>
+          <p:nvPr/>
+        </p:nvSpPr>
+        <p:spPr>
+          <a:xfrm>
+            <a:off x="0" y="6720840"/>
+            <a:ext cx="73152" cy="137160"/>
+          </a:xfrm>
+          <a:prstGeom prst="rect">
+            <a:avLst/>
+          </a:prstGeom>
+          <a:solidFill>
+            <a:srgbClr val="38BDF8"/>
+          </a:solidFill>
+          <a:ln/>
+        </p:spPr>
+      </p:sp>
+      <p:sp>
+        <p:nvSpPr>
+          <p:cNvPr id="7" name="Text 5"/>
+          <p:cNvSpPr/>
+          <p:nvPr/>
+        </p:nvSpPr>
+        <p:spPr>
+          <a:xfrm>
+            <a:off x="274320" y="6720840"/>
+            <a:ext cx="2743200" cy="137160"/>
+          </a:xfrm>
+          <a:prstGeom prst="rect">
+            <a:avLst/>
+          </a:prstGeom>
+          <a:noFill/>
+          <a:ln/>
+        </p:spPr>
+        <p:txBody>
+          <a:bodyPr wrap="square" rtlCol="0" anchor="ctr"/>
+          <a:lstStyle/>
+          <a:p>
+            <a:pPr indent="0" marL="0">
+              <a:buNone/>
+            </a:pPr>
+            <a:r>
+              <a:rPr lang="en-US" sz="1000" dirty="0">
+                <a:solidFill>
+                  <a:srgbClr val="6B7280"/>
+                </a:solidFill>
+                <a:latin typeface="Calibri" pitchFamily="34" charset="0"/>
+                <a:ea typeface="Calibri" pitchFamily="34" charset="-122"/>
+                <a:cs typeface="Calibri" pitchFamily="34" charset="-120"/>
+              </a:rPr>
+              <a:t>Creatives Takeover</a:t>
+            </a:r>
+            <a:endParaRPr lang="en-US" sz="1000" dirty="0"/>
+          </a:p>
+        </p:txBody>
+      </p:sp>
+      <p:sp>
+        <p:nvSpPr>
+          <p:cNvPr id="8" name="Text 6"/>
+          <p:cNvSpPr/>
+          <p:nvPr/>
+        </p:nvSpPr>
+        <p:spPr>
+          <a:xfrm>
+            <a:off x="8412480" y="6720840"/>
+            <a:ext cx="274320" cy="137160"/>
+          </a:xfrm>
+          <a:prstGeom prst="rect">
+            <a:avLst/>
+          </a:prstGeom>
+          <a:noFill/>
+          <a:ln/>
+        </p:spPr>
+        <p:txBody>
+          <a:bodyPr wrap="square" rtlCol="0" anchor="ctr"/>
+          <a:lstStyle/>
+          <a:p>
+            <a:pPr algn="r" indent="0" marL="0">
+              <a:buNone/>
+            </a:pPr>
+            <a:r>
+              <a:rPr lang="en-US" sz="1000" dirty="0">
+                <a:solidFill>
+                  <a:srgbClr val="6B7280"/>
+                </a:solidFill>
+                <a:latin typeface="Calibri" pitchFamily="34" charset="0"/>
+                <a:ea typeface="Calibri" pitchFamily="34" charset="-122"/>
+                <a:cs typeface="Calibri" pitchFamily="34" charset="-120"/>
+              </a:rPr>
+              <a:t>11</a:t>
+            </a:r>
+            <a:endParaRPr lang="en-US" sz="1000" dirty="0"/>
           </a:p>
         </p:txBody>
       </p:sp>
@@ -2496,6 +2611,13 @@
 <file path=ppt/slides/slide12.xml><?xml version="1.0" encoding="utf-8"?>
 <p:sld xmlns:a="http://schemas.openxmlformats.org/drawingml/2006/main" xmlns:r="http://schemas.openxmlformats.org/officeDocument/2006/relationships" xmlns:p="http://schemas.openxmlformats.org/presentationml/2006/main">
   <p:cSld name="Slide 12">
+    <p:bg>
+      <p:bgPr>
+        <a:solidFill>
+          <a:srgbClr val="FFFFFF"/>
+        </a:solidFill>
+      </p:bgPr>
+    </p:bg>
     <p:spTree>
       <p:nvGrpSpPr>
         <p:cNvPr id="1" name=""/>
@@ -2512,14 +2634,34 @@
       </p:grpSpPr>
       <p:sp>
         <p:nvSpPr>
-          <p:cNvPr id="2" name="Text 0"/>
-          <p:cNvSpPr/>
-          <p:nvPr/>
-        </p:nvSpPr>
-        <p:spPr>
-          <a:xfrm>
-            <a:off x="457200" y="457200"/>
-            <a:ext cx="8229600" cy="685800"/>
+          <p:cNvPr id="2" name="Shape 0"/>
+          <p:cNvSpPr/>
+          <p:nvPr/>
+        </p:nvSpPr>
+        <p:spPr>
+          <a:xfrm>
+            <a:off x="0" y="0"/>
+            <a:ext cx="9144000" cy="137160"/>
+          </a:xfrm>
+          <a:prstGeom prst="rect">
+            <a:avLst/>
+          </a:prstGeom>
+          <a:solidFill>
+            <a:srgbClr val="0B1437"/>
+          </a:solidFill>
+          <a:ln/>
+        </p:spPr>
+      </p:sp>
+      <p:sp>
+        <p:nvSpPr>
+          <p:cNvPr id="3" name="Text 1"/>
+          <p:cNvSpPr/>
+          <p:nvPr/>
+        </p:nvSpPr>
+        <p:spPr>
+          <a:xfrm>
+            <a:off x="457200" y="365760"/>
+            <a:ext cx="8229600" cy="548640"/>
           </a:xfrm>
           <a:prstGeom prst="rect">
             <a:avLst/>
@@ -2539,8 +2681,11 @@
                 <a:solidFill>
                   <a:srgbClr val="0B1437"/>
                 </a:solidFill>
-              </a:rPr>
-              <a:t>Team</a:t>
+                <a:latin typeface="Calibri" pitchFamily="34" charset="0"/>
+                <a:ea typeface="Calibri" pitchFamily="34" charset="-122"/>
+                <a:cs typeface="Calibri" pitchFamily="34" charset="-120"/>
+              </a:rPr>
+              <a:t>The Ask</a:t>
             </a:r>
             <a:endParaRPr lang="en-US" sz="3200" dirty="0"/>
           </a:p>
@@ -2548,7 +2693,46 @@
       </p:sp>
       <p:sp>
         <p:nvSpPr>
-          <p:cNvPr id="3" name="Text 1"/>
+          <p:cNvPr id="4" name="Text 2"/>
+          <p:cNvSpPr/>
+          <p:nvPr/>
+        </p:nvSpPr>
+        <p:spPr>
+          <a:xfrm>
+            <a:off x="457200" y="914400"/>
+            <a:ext cx="8229600" cy="365760"/>
+          </a:xfrm>
+          <a:prstGeom prst="rect">
+            <a:avLst/>
+          </a:prstGeom>
+          <a:noFill/>
+          <a:ln/>
+        </p:spPr>
+        <p:txBody>
+          <a:bodyPr wrap="square" rtlCol="0" anchor="ctr"/>
+          <a:lstStyle/>
+          <a:p>
+            <a:pPr indent="0" marL="0">
+              <a:buNone/>
+            </a:pPr>
+            <a:r>
+              <a:rPr lang="en-US" sz="1600" i="1" dirty="0">
+                <a:solidFill>
+                  <a:srgbClr val="6B7280"/>
+                </a:solidFill>
+                <a:latin typeface="Calibri" pitchFamily="34" charset="0"/>
+                <a:ea typeface="Calibri" pitchFamily="34" charset="-122"/>
+                <a:cs typeface="Calibri" pitchFamily="34" charset="-120"/>
+              </a:rPr>
+              <a:t>Raising $3M Series A</a:t>
+            </a:r>
+            <a:endParaRPr lang="en-US" sz="1600" dirty="0"/>
+          </a:p>
+        </p:txBody>
+      </p:sp>
+      <p:sp>
+        <p:nvSpPr>
+          <p:cNvPr id="5" name="Text 3"/>
           <p:cNvSpPr/>
           <p:nvPr/>
         </p:nvSpPr>
@@ -2575,14 +2759,17 @@
               <a:buChar char="•"/>
             </a:pPr>
             <a:r>
-              <a:rPr lang="en-US" sz="1600" dirty="0">
-                <a:solidFill>
-                  <a:srgbClr val="374151"/>
-                </a:solidFill>
-              </a:rPr>
-              <a:t>Founders and key hires</a:t>
-            </a:r>
-            <a:endParaRPr lang="en-US" sz="1600" dirty="0"/>
+              <a:rPr lang="en-US" sz="2400" b="1" dirty="0">
+                <a:solidFill>
+                  <a:srgbClr val="0B1437"/>
+                </a:solidFill>
+                <a:latin typeface="Calibri" pitchFamily="34" charset="0"/>
+                <a:ea typeface="Calibri" pitchFamily="34" charset="-122"/>
+                <a:cs typeface="Calibri" pitchFamily="34" charset="-120"/>
+              </a:rPr>
+              <a:t>Raising $3M at $15M pre-money valuation</a:t>
+            </a:r>
+            <a:endParaRPr lang="en-US" sz="2400" dirty="0"/>
           </a:p>
           <a:p>
             <a:pPr marL="342900" indent="-342900">
@@ -2593,14 +2780,80 @@
               <a:buChar char="•"/>
             </a:pPr>
             <a:r>
-              <a:rPr lang="en-US" sz="1600" dirty="0">
-                <a:solidFill>
-                  <a:srgbClr val="374151"/>
-                </a:solidFill>
-              </a:rPr>
-              <a:t>Relevant experience</a:t>
-            </a:r>
-            <a:endParaRPr lang="en-US" sz="1600" dirty="0"/>
+              <a:rPr lang="en-US" sz="1800" b="1" dirty="0">
+                <a:solidFill>
+                  <a:srgbClr val="1F2937"/>
+                </a:solidFill>
+                <a:latin typeface="Calibri" pitchFamily="34" charset="0"/>
+                <a:ea typeface="Calibri" pitchFamily="34" charset="-122"/>
+                <a:cs typeface="Calibri" pitchFamily="34" charset="-120"/>
+              </a:rPr>
+              <a:t>Use of Funds:</a:t>
+            </a:r>
+            <a:endParaRPr lang="en-US" sz="2400" dirty="0"/>
+          </a:p>
+          <a:p>
+            <a:pPr lvl="1" marL="685800" indent="-342900">
+              <a:lnSpc>
+                <a:spcPts val="2800"/>
+              </a:lnSpc>
+              <a:buSzPct val="100000"/>
+              <a:buChar char="•"/>
+            </a:pPr>
+            <a:r>
+              <a:rPr lang="en-US" sz="1800" dirty="0">
+                <a:solidFill>
+                  <a:srgbClr val="6B7280"/>
+                </a:solidFill>
+                <a:latin typeface="Calibri" pitchFamily="34" charset="0"/>
+                <a:ea typeface="Calibri" pitchFamily="34" charset="-122"/>
+                <a:cs typeface="Calibri" pitchFamily="34" charset="-120"/>
+              </a:rPr>
+              <a:t>50% - Engineering (scale to support 10K customers)</a:t>
+            </a:r>
+            <a:endParaRPr lang="en-US" sz="2400" dirty="0"/>
+          </a:p>
+          <a:p>
+            <a:pPr lvl="1" marL="685800" indent="-342900">
+              <a:lnSpc>
+                <a:spcPts val="2800"/>
+              </a:lnSpc>
+              <a:buSzPct val="100000"/>
+              <a:buChar char="•"/>
+            </a:pPr>
+            <a:r>
+              <a:rPr lang="en-US" sz="1800" dirty="0">
+                <a:solidFill>
+                  <a:srgbClr val="6B7280"/>
+                </a:solidFill>
+                <a:latin typeface="Calibri" pitchFamily="34" charset="0"/>
+                <a:ea typeface="Calibri" pitchFamily="34" charset="-122"/>
+                <a:cs typeface="Calibri" pitchFamily="34" charset="-120"/>
+              </a:rPr>
+              <a:t>30% - Sales &amp; Marketing (10x customer acquisition)</a:t>
+            </a:r>
+            <a:endParaRPr lang="en-US" sz="2400" dirty="0"/>
+          </a:p>
+          <a:p>
+            <a:pPr lvl="1" marL="685800" indent="-342900">
+              <a:lnSpc>
+                <a:spcPts val="2800"/>
+              </a:lnSpc>
+              <a:buSzPct val="100000"/>
+              <a:buChar char="•"/>
+            </a:pPr>
+            <a:r>
+              <a:rPr lang="en-US" sz="1800" dirty="0">
+                <a:solidFill>
+                  <a:srgbClr val="6B7280"/>
+                </a:solidFill>
+                <a:latin typeface="Calibri" pitchFamily="34" charset="0"/>
+                <a:ea typeface="Calibri" pitchFamily="34" charset="-122"/>
+                <a:cs typeface="Calibri" pitchFamily="34" charset="-120"/>
+              </a:rPr>
+              <a:t>20% - Operations &amp; Infrastructure</a:t>
+            </a:r>
+            <a:endParaRPr lang="en-US" sz="2400" dirty="0"/>
           </a:p>
           <a:p>
             <a:pPr marL="342900" indent="-342900">
@@ -2611,14 +2864,115 @@
               <a:buChar char="•"/>
             </a:pPr>
             <a:r>
-              <a:rPr lang="en-US" sz="1600" dirty="0">
-                <a:solidFill>
-                  <a:srgbClr val="374151"/>
-                </a:solidFill>
-              </a:rPr>
-              <a:t>Track record</a:t>
-            </a:r>
-            <a:endParaRPr lang="en-US" sz="1600" dirty="0"/>
+              <a:rPr lang="en-US" sz="1800" b="1" dirty="0">
+                <a:solidFill>
+                  <a:srgbClr val="1F2937"/>
+                </a:solidFill>
+                <a:latin typeface="Calibri" pitchFamily="34" charset="0"/>
+                <a:ea typeface="Calibri" pitchFamily="34" charset="-122"/>
+                <a:cs typeface="Calibri" pitchFamily="34" charset="-120"/>
+              </a:rPr>
+              <a:t>18-month milestones: $3M ARR, 5,000 customers, enterprise tier launched</a:t>
+            </a:r>
+            <a:endParaRPr lang="en-US" sz="2400" dirty="0"/>
+          </a:p>
+        </p:txBody>
+      </p:sp>
+      <p:sp>
+        <p:nvSpPr>
+          <p:cNvPr id="6" name="Shape 4"/>
+          <p:cNvSpPr/>
+          <p:nvPr/>
+        </p:nvSpPr>
+        <p:spPr>
+          <a:xfrm>
+            <a:off x="0" y="6720840"/>
+            <a:ext cx="73152" cy="137160"/>
+          </a:xfrm>
+          <a:prstGeom prst="rect">
+            <a:avLst/>
+          </a:prstGeom>
+          <a:solidFill>
+            <a:srgbClr val="38BDF8"/>
+          </a:solidFill>
+          <a:ln/>
+        </p:spPr>
+      </p:sp>
+      <p:sp>
+        <p:nvSpPr>
+          <p:cNvPr id="7" name="Text 5"/>
+          <p:cNvSpPr/>
+          <p:nvPr/>
+        </p:nvSpPr>
+        <p:spPr>
+          <a:xfrm>
+            <a:off x="274320" y="6720840"/>
+            <a:ext cx="2743200" cy="137160"/>
+          </a:xfrm>
+          <a:prstGeom prst="rect">
+            <a:avLst/>
+          </a:prstGeom>
+          <a:noFill/>
+          <a:ln/>
+        </p:spPr>
+        <p:txBody>
+          <a:bodyPr wrap="square" rtlCol="0" anchor="ctr"/>
+          <a:lstStyle/>
+          <a:p>
+            <a:pPr indent="0" marL="0">
+              <a:buNone/>
+            </a:pPr>
+            <a:r>
+              <a:rPr lang="en-US" sz="1000" dirty="0">
+                <a:solidFill>
+                  <a:srgbClr val="6B7280"/>
+                </a:solidFill>
+                <a:latin typeface="Calibri" pitchFamily="34" charset="0"/>
+                <a:ea typeface="Calibri" pitchFamily="34" charset="-122"/>
+                <a:cs typeface="Calibri" pitchFamily="34" charset="-120"/>
+              </a:rPr>
+              <a:t>Creatives Takeover</a:t>
+            </a:r>
+            <a:endParaRPr lang="en-US" sz="1000" dirty="0"/>
+          </a:p>
+        </p:txBody>
+      </p:sp>
+      <p:sp>
+        <p:nvSpPr>
+          <p:cNvPr id="8" name="Text 6"/>
+          <p:cNvSpPr/>
+          <p:nvPr/>
+        </p:nvSpPr>
+        <p:spPr>
+          <a:xfrm>
+            <a:off x="8412480" y="6720840"/>
+            <a:ext cx="274320" cy="137160"/>
+          </a:xfrm>
+          <a:prstGeom prst="rect">
+            <a:avLst/>
+          </a:prstGeom>
+          <a:noFill/>
+          <a:ln/>
+        </p:spPr>
+        <p:txBody>
+          <a:bodyPr wrap="square" rtlCol="0" anchor="ctr"/>
+          <a:lstStyle/>
+          <a:p>
+            <a:pPr algn="r" indent="0" marL="0">
+              <a:buNone/>
+            </a:pPr>
+            <a:r>
+              <a:rPr lang="en-US" sz="1000" dirty="0">
+                <a:solidFill>
+                  <a:srgbClr val="6B7280"/>
+                </a:solidFill>
+                <a:latin typeface="Calibri" pitchFamily="34" charset="0"/>
+                <a:ea typeface="Calibri" pitchFamily="34" charset="-122"/>
+                <a:cs typeface="Calibri" pitchFamily="34" charset="-120"/>
+              </a:rPr>
+              <a:t>12</a:t>
+            </a:r>
+            <a:endParaRPr lang="en-US" sz="1000" dirty="0"/>
           </a:p>
         </p:txBody>
       </p:sp>
@@ -2630,9 +2984,16 @@
 </p:sld>
 </file>
 
-<file path=ppt/slides/slide13.xml><?xml version="1.0" encoding="utf-8"?>
+<file path=ppt/slides/slide2.xml><?xml version="1.0" encoding="utf-8"?>
 <p:sld xmlns:a="http://schemas.openxmlformats.org/drawingml/2006/main" xmlns:r="http://schemas.openxmlformats.org/officeDocument/2006/relationships" xmlns:p="http://schemas.openxmlformats.org/presentationml/2006/main">
-  <p:cSld name="Slide 13">
+  <p:cSld name="Slide 2">
+    <p:bg>
+      <p:bgPr>
+        <a:solidFill>
+          <a:srgbClr val="FFFFFF"/>
+        </a:solidFill>
+      </p:bgPr>
+    </p:bg>
     <p:spTree>
       <p:nvGrpSpPr>
         <p:cNvPr id="1" name=""/>
@@ -2649,14 +3010,34 @@
       </p:grpSpPr>
       <p:sp>
         <p:nvSpPr>
-          <p:cNvPr id="2" name="Text 0"/>
-          <p:cNvSpPr/>
-          <p:nvPr/>
-        </p:nvSpPr>
-        <p:spPr>
-          <a:xfrm>
-            <a:off x="457200" y="457200"/>
-            <a:ext cx="8229600" cy="685800"/>
+          <p:cNvPr id="2" name="Shape 0"/>
+          <p:cNvSpPr/>
+          <p:nvPr/>
+        </p:nvSpPr>
+        <p:spPr>
+          <a:xfrm>
+            <a:off x="0" y="0"/>
+            <a:ext cx="9144000" cy="137160"/>
+          </a:xfrm>
+          <a:prstGeom prst="rect">
+            <a:avLst/>
+          </a:prstGeom>
+          <a:solidFill>
+            <a:srgbClr val="0B1437"/>
+          </a:solidFill>
+          <a:ln/>
+        </p:spPr>
+      </p:sp>
+      <p:sp>
+        <p:nvSpPr>
+          <p:cNvPr id="3" name="Text 1"/>
+          <p:cNvSpPr/>
+          <p:nvPr/>
+        </p:nvSpPr>
+        <p:spPr>
+          <a:xfrm>
+            <a:off x="457200" y="365760"/>
+            <a:ext cx="8229600" cy="548640"/>
           </a:xfrm>
           <a:prstGeom prst="rect">
             <a:avLst/>
@@ -2676,8 +3057,11 @@
                 <a:solidFill>
                   <a:srgbClr val="0B1437"/>
                 </a:solidFill>
-              </a:rPr>
-              <a:t>Ask &amp; Use of Funds</a:t>
+                <a:latin typeface="Calibri" pitchFamily="34" charset="0"/>
+                <a:ea typeface="Calibri" pitchFamily="34" charset="-122"/>
+                <a:cs typeface="Calibri" pitchFamily="34" charset="-120"/>
+              </a:rPr>
+              <a:t>Traction</a:t>
             </a:r>
             <a:endParaRPr lang="en-US" sz="3200" dirty="0"/>
           </a:p>
@@ -2685,7 +3069,46 @@
       </p:sp>
       <p:sp>
         <p:nvSpPr>
-          <p:cNvPr id="3" name="Text 1"/>
+          <p:cNvPr id="4" name="Text 2"/>
+          <p:cNvSpPr/>
+          <p:nvPr/>
+        </p:nvSpPr>
+        <p:spPr>
+          <a:xfrm>
+            <a:off x="457200" y="914400"/>
+            <a:ext cx="8229600" cy="365760"/>
+          </a:xfrm>
+          <a:prstGeom prst="rect">
+            <a:avLst/>
+          </a:prstGeom>
+          <a:noFill/>
+          <a:ln/>
+        </p:spPr>
+        <p:txBody>
+          <a:bodyPr wrap="square" rtlCol="0" anchor="ctr"/>
+          <a:lstStyle/>
+          <a:p>
+            <a:pPr indent="0" marL="0">
+              <a:buNone/>
+            </a:pPr>
+            <a:r>
+              <a:rPr lang="en-US" sz="1600" i="1" dirty="0">
+                <a:solidFill>
+                  <a:srgbClr val="6B7280"/>
+                </a:solidFill>
+                <a:latin typeface="Calibri" pitchFamily="34" charset="0"/>
+                <a:ea typeface="Calibri" pitchFamily="34" charset="-122"/>
+                <a:cs typeface="Calibri" pitchFamily="34" charset="-120"/>
+              </a:rPr>
+              <a:t>Start with your best metric</a:t>
+            </a:r>
+            <a:endParaRPr lang="en-US" sz="1600" dirty="0"/>
+          </a:p>
+        </p:txBody>
+      </p:sp>
+      <p:sp>
+        <p:nvSpPr>
+          <p:cNvPr id="5" name="Text 3"/>
           <p:cNvSpPr/>
           <p:nvPr/>
         </p:nvSpPr>
@@ -2712,14 +3135,17 @@
               <a:buChar char="•"/>
             </a:pPr>
             <a:r>
-              <a:rPr lang="en-US" sz="1600" dirty="0">
-                <a:solidFill>
-                  <a:srgbClr val="374151"/>
-                </a:solidFill>
-              </a:rPr>
-              <a:t>Round size</a:t>
-            </a:r>
-            <a:endParaRPr lang="en-US" sz="1600" dirty="0"/>
+              <a:rPr lang="en-US" sz="2400" b="1" dirty="0">
+                <a:solidFill>
+                  <a:srgbClr val="10B981"/>
+                </a:solidFill>
+                <a:latin typeface="Calibri" pitchFamily="34" charset="0"/>
+                <a:ea typeface="Calibri" pitchFamily="34" charset="-122"/>
+                <a:cs typeface="Calibri" pitchFamily="34" charset="-120"/>
+              </a:rPr>
+              <a:t>$500K ARR with 50% month-over-month growth</a:t>
+            </a:r>
+            <a:endParaRPr lang="en-US" sz="2400" dirty="0"/>
           </a:p>
           <a:p>
             <a:pPr marL="342900" indent="-342900">
@@ -2730,14 +3156,38 @@
               <a:buChar char="•"/>
             </a:pPr>
             <a:r>
-              <a:rPr lang="en-US" sz="1600" dirty="0">
-                <a:solidFill>
-                  <a:srgbClr val="374151"/>
-                </a:solidFill>
-              </a:rPr>
-              <a:t>Use of funds</a:t>
-            </a:r>
-            <a:endParaRPr lang="en-US" sz="1600" dirty="0"/>
+              <a:rPr lang="en-US" sz="1800" b="1" dirty="0">
+                <a:solidFill>
+                  <a:srgbClr val="1F2937"/>
+                </a:solidFill>
+                <a:latin typeface="Calibri" pitchFamily="34" charset="0"/>
+                <a:ea typeface="Calibri" pitchFamily="34" charset="-122"/>
+                <a:cs typeface="Calibri" pitchFamily="34" charset="-120"/>
+              </a:rPr>
+              <a:t>2,000 paying customers across 25 industries</a:t>
+            </a:r>
+            <a:endParaRPr lang="en-US" sz="2400" dirty="0"/>
+          </a:p>
+          <a:p>
+            <a:pPr lvl="1" marL="685800" indent="-342900">
+              <a:lnSpc>
+                <a:spcPts val="2800"/>
+              </a:lnSpc>
+              <a:buSzPct val="100000"/>
+              <a:buChar char="•"/>
+            </a:pPr>
+            <a:r>
+              <a:rPr lang="en-US" sz="1800" dirty="0">
+                <a:solidFill>
+                  <a:srgbClr val="6B7280"/>
+                </a:solidFill>
+                <a:latin typeface="Calibri" pitchFamily="34" charset="0"/>
+                <a:ea typeface="Calibri" pitchFamily="34" charset="-122"/>
+                <a:cs typeface="Calibri" pitchFamily="34" charset="-120"/>
+              </a:rPr>
+              <a:t>Example: "From bakeries to law firms, our customers save an average of 15 hours/week"</a:t>
+            </a:r>
+            <a:endParaRPr lang="en-US" sz="2400" dirty="0"/>
           </a:p>
           <a:p>
             <a:pPr marL="342900" indent="-342900">
@@ -2748,14 +3198,38 @@
               <a:buChar char="•"/>
             </a:pPr>
             <a:r>
-              <a:rPr lang="en-US" sz="1600" dirty="0">
-                <a:solidFill>
-                  <a:srgbClr val="374151"/>
-                </a:solidFill>
-              </a:rPr>
-              <a:t>Milestones with funding</a:t>
-            </a:r>
-            <a:endParaRPr lang="en-US" sz="1600" dirty="0"/>
+              <a:rPr lang="en-US" sz="1800" b="1" dirty="0">
+                <a:solidFill>
+                  <a:srgbClr val="1F2937"/>
+                </a:solidFill>
+                <a:latin typeface="Calibri" pitchFamily="34" charset="0"/>
+                <a:ea typeface="Calibri" pitchFamily="34" charset="-122"/>
+                <a:cs typeface="Calibri" pitchFamily="34" charset="-120"/>
+              </a:rPr>
+              <a:t>130% Net Revenue Retention</a:t>
+            </a:r>
+            <a:endParaRPr lang="en-US" sz="2400" dirty="0"/>
+          </a:p>
+          <a:p>
+            <a:pPr lvl="1" marL="685800" indent="-342900">
+              <a:lnSpc>
+                <a:spcPts val="2800"/>
+              </a:lnSpc>
+              <a:buSzPct val="100000"/>
+              <a:buChar char="•"/>
+            </a:pPr>
+            <a:r>
+              <a:rPr lang="en-US" sz="1800" dirty="0">
+                <a:solidFill>
+                  <a:srgbClr val="6B7280"/>
+                </a:solidFill>
+                <a:latin typeface="Calibri" pitchFamily="34" charset="0"/>
+                <a:ea typeface="Calibri" pitchFamily="34" charset="-122"/>
+                <a:cs typeface="Calibri" pitchFamily="34" charset="-120"/>
+              </a:rPr>
+              <a:t>Customers expand usage after onboarding - average spend increases 30% in first year</a:t>
+            </a:r>
+            <a:endParaRPr lang="en-US" sz="2400" dirty="0"/>
           </a:p>
           <a:p>
             <a:pPr marL="342900" indent="-342900">
@@ -2766,14 +3240,136 @@
               <a:buChar char="•"/>
             </a:pPr>
             <a:r>
-              <a:rPr lang="en-US" sz="1600" dirty="0">
-                <a:solidFill>
-                  <a:srgbClr val="374151"/>
-                </a:solidFill>
-              </a:rPr>
-              <a:t>Timeline to next milestone</a:t>
-            </a:r>
-            <a:endParaRPr lang="en-US" sz="1600" dirty="0"/>
+              <a:rPr lang="en-US" sz="1800" b="1" dirty="0">
+                <a:solidFill>
+                  <a:srgbClr val="1F2937"/>
+                </a:solidFill>
+                <a:latin typeface="Calibri" pitchFamily="34" charset="0"/>
+                <a:ea typeface="Calibri" pitchFamily="34" charset="-122"/>
+                <a:cs typeface="Calibri" pitchFamily="34" charset="-120"/>
+              </a:rPr>
+              <a:t>Key growth milestones:</a:t>
+            </a:r>
+            <a:endParaRPr lang="en-US" sz="2400" dirty="0"/>
+          </a:p>
+          <a:p>
+            <a:pPr lvl="1" marL="685800" indent="-342900">
+              <a:lnSpc>
+                <a:spcPts val="2800"/>
+              </a:lnSpc>
+              <a:buSzPct val="100000"/>
+              <a:buChar char="•"/>
+            </a:pPr>
+            <a:r>
+              <a:rPr lang="en-US" sz="1800" dirty="0">
+                <a:solidFill>
+                  <a:srgbClr val="6B7280"/>
+                </a:solidFill>
+                <a:latin typeface="Calibri" pitchFamily="34" charset="0"/>
+                <a:ea typeface="Calibri" pitchFamily="34" charset="-122"/>
+                <a:cs typeface="Calibri" pitchFamily="34" charset="-120"/>
+              </a:rPr>
+              <a:t>Month 1: $10K MRR | Month 6: $100K MRR | Month 12: $500K MRR</a:t>
+            </a:r>
+            <a:endParaRPr lang="en-US" sz="2400" dirty="0"/>
+          </a:p>
+        </p:txBody>
+      </p:sp>
+      <p:sp>
+        <p:nvSpPr>
+          <p:cNvPr id="6" name="Shape 4"/>
+          <p:cNvSpPr/>
+          <p:nvPr/>
+        </p:nvSpPr>
+        <p:spPr>
+          <a:xfrm>
+            <a:off x="0" y="6720840"/>
+            <a:ext cx="73152" cy="137160"/>
+          </a:xfrm>
+          <a:prstGeom prst="rect">
+            <a:avLst/>
+          </a:prstGeom>
+          <a:solidFill>
+            <a:srgbClr val="38BDF8"/>
+          </a:solidFill>
+          <a:ln/>
+        </p:spPr>
+      </p:sp>
+      <p:sp>
+        <p:nvSpPr>
+          <p:cNvPr id="7" name="Text 5"/>
+          <p:cNvSpPr/>
+          <p:nvPr/>
+        </p:nvSpPr>
+        <p:spPr>
+          <a:xfrm>
+            <a:off x="274320" y="6720840"/>
+            <a:ext cx="2743200" cy="137160"/>
+          </a:xfrm>
+          <a:prstGeom prst="rect">
+            <a:avLst/>
+          </a:prstGeom>
+          <a:noFill/>
+          <a:ln/>
+        </p:spPr>
+        <p:txBody>
+          <a:bodyPr wrap="square" rtlCol="0" anchor="ctr"/>
+          <a:lstStyle/>
+          <a:p>
+            <a:pPr indent="0" marL="0">
+              <a:buNone/>
+            </a:pPr>
+            <a:r>
+              <a:rPr lang="en-US" sz="1000" dirty="0">
+                <a:solidFill>
+                  <a:srgbClr val="6B7280"/>
+                </a:solidFill>
+                <a:latin typeface="Calibri" pitchFamily="34" charset="0"/>
+                <a:ea typeface="Calibri" pitchFamily="34" charset="-122"/>
+                <a:cs typeface="Calibri" pitchFamily="34" charset="-120"/>
+              </a:rPr>
+              <a:t>Creatives Takeover</a:t>
+            </a:r>
+            <a:endParaRPr lang="en-US" sz="1000" dirty="0"/>
+          </a:p>
+        </p:txBody>
+      </p:sp>
+      <p:sp>
+        <p:nvSpPr>
+          <p:cNvPr id="8" name="Text 6"/>
+          <p:cNvSpPr/>
+          <p:nvPr/>
+        </p:nvSpPr>
+        <p:spPr>
+          <a:xfrm>
+            <a:off x="8412480" y="6720840"/>
+            <a:ext cx="274320" cy="137160"/>
+          </a:xfrm>
+          <a:prstGeom prst="rect">
+            <a:avLst/>
+          </a:prstGeom>
+          <a:noFill/>
+          <a:ln/>
+        </p:spPr>
+        <p:txBody>
+          <a:bodyPr wrap="square" rtlCol="0" anchor="ctr"/>
+          <a:lstStyle/>
+          <a:p>
+            <a:pPr algn="r" indent="0" marL="0">
+              <a:buNone/>
+            </a:pPr>
+            <a:r>
+              <a:rPr lang="en-US" sz="1000" dirty="0">
+                <a:solidFill>
+                  <a:srgbClr val="6B7280"/>
+                </a:solidFill>
+                <a:latin typeface="Calibri" pitchFamily="34" charset="0"/>
+                <a:ea typeface="Calibri" pitchFamily="34" charset="-122"/>
+                <a:cs typeface="Calibri" pitchFamily="34" charset="-120"/>
+              </a:rPr>
+              <a:t>2</a:t>
+            </a:r>
+            <a:endParaRPr lang="en-US" sz="1000" dirty="0"/>
           </a:p>
         </p:txBody>
       </p:sp>
@@ -2785,9 +3381,16 @@
 </p:sld>
 </file>
 
-<file path=ppt/slides/slide2.xml><?xml version="1.0" encoding="utf-8"?>
+<file path=ppt/slides/slide3.xml><?xml version="1.0" encoding="utf-8"?>
 <p:sld xmlns:a="http://schemas.openxmlformats.org/drawingml/2006/main" xmlns:r="http://schemas.openxmlformats.org/officeDocument/2006/relationships" xmlns:p="http://schemas.openxmlformats.org/presentationml/2006/main">
-  <p:cSld name="Slide 2">
+  <p:cSld name="Slide 3">
+    <p:bg>
+      <p:bgPr>
+        <a:solidFill>
+          <a:srgbClr val="FFFFFF"/>
+        </a:solidFill>
+      </p:bgPr>
+    </p:bg>
     <p:spTree>
       <p:nvGrpSpPr>
         <p:cNvPr id="1" name=""/>
@@ -2804,14 +3407,34 @@
       </p:grpSpPr>
       <p:sp>
         <p:nvSpPr>
-          <p:cNvPr id="2" name="Text 0"/>
-          <p:cNvSpPr/>
-          <p:nvPr/>
-        </p:nvSpPr>
-        <p:spPr>
-          <a:xfrm>
-            <a:off x="457200" y="457200"/>
-            <a:ext cx="8229600" cy="685800"/>
+          <p:cNvPr id="2" name="Shape 0"/>
+          <p:cNvSpPr/>
+          <p:nvPr/>
+        </p:nvSpPr>
+        <p:spPr>
+          <a:xfrm>
+            <a:off x="0" y="0"/>
+            <a:ext cx="9144000" cy="137160"/>
+          </a:xfrm>
+          <a:prstGeom prst="rect">
+            <a:avLst/>
+          </a:prstGeom>
+          <a:solidFill>
+            <a:srgbClr val="0B1437"/>
+          </a:solidFill>
+          <a:ln/>
+        </p:spPr>
+      </p:sp>
+      <p:sp>
+        <p:nvSpPr>
+          <p:cNvPr id="3" name="Text 1"/>
+          <p:cNvSpPr/>
+          <p:nvPr/>
+        </p:nvSpPr>
+        <p:spPr>
+          <a:xfrm>
+            <a:off x="457200" y="365760"/>
+            <a:ext cx="8229600" cy="548640"/>
           </a:xfrm>
           <a:prstGeom prst="rect">
             <a:avLst/>
@@ -2831,8 +3454,11 @@
                 <a:solidFill>
                   <a:srgbClr val="0B1437"/>
                 </a:solidFill>
-              </a:rPr>
-              <a:t>Cover Slide</a:t>
+                <a:latin typeface="Calibri" pitchFamily="34" charset="0"/>
+                <a:ea typeface="Calibri" pitchFamily="34" charset="-122"/>
+                <a:cs typeface="Calibri" pitchFamily="34" charset="-120"/>
+              </a:rPr>
+              <a:t>The Problem</a:t>
             </a:r>
             <a:endParaRPr lang="en-US" sz="3200" dirty="0"/>
           </a:p>
@@ -2840,7 +3466,46 @@
       </p:sp>
       <p:sp>
         <p:nvSpPr>
-          <p:cNvPr id="3" name="Text 1"/>
+          <p:cNvPr id="4" name="Text 2"/>
+          <p:cNvSpPr/>
+          <p:nvPr/>
+        </p:nvSpPr>
+        <p:spPr>
+          <a:xfrm>
+            <a:off x="457200" y="914400"/>
+            <a:ext cx="8229600" cy="365760"/>
+          </a:xfrm>
+          <a:prstGeom prst="rect">
+            <a:avLst/>
+          </a:prstGeom>
+          <a:noFill/>
+          <a:ln/>
+        </p:spPr>
+        <p:txBody>
+          <a:bodyPr wrap="square" rtlCol="0" anchor="ctr"/>
+          <a:lstStyle/>
+          <a:p>
+            <a:pPr indent="0" marL="0">
+              <a:buNone/>
+            </a:pPr>
+            <a:r>
+              <a:rPr lang="en-US" sz="1600" i="1" dirty="0">
+                <a:solidFill>
+                  <a:srgbClr val="6B7280"/>
+                </a:solidFill>
+                <a:latin typeface="Calibri" pitchFamily="34" charset="0"/>
+                <a:ea typeface="Calibri" pitchFamily="34" charset="-122"/>
+                <a:cs typeface="Calibri" pitchFamily="34" charset="-120"/>
+              </a:rPr>
+              <a:t>Why this matters</a:t>
+            </a:r>
+            <a:endParaRPr lang="en-US" sz="1600" dirty="0"/>
+          </a:p>
+        </p:txBody>
+      </p:sp>
+      <p:sp>
+        <p:nvSpPr>
+          <p:cNvPr id="5" name="Text 3"/>
           <p:cNvSpPr/>
           <p:nvPr/>
         </p:nvSpPr>
@@ -2867,14 +3532,17 @@
               <a:buChar char="•"/>
             </a:pPr>
             <a:r>
-              <a:rPr lang="en-US" sz="1600" dirty="0">
-                <a:solidFill>
-                  <a:srgbClr val="374151"/>
-                </a:solidFill>
-              </a:rPr>
-              <a:t>Company name and logo</a:t>
-            </a:r>
-            <a:endParaRPr lang="en-US" sz="1600" dirty="0"/>
+              <a:rPr lang="en-US" sz="1800" b="1" dirty="0">
+                <a:solidFill>
+                  <a:srgbClr val="1F2937"/>
+                </a:solidFill>
+                <a:latin typeface="Calibri" pitchFamily="34" charset="0"/>
+                <a:ea typeface="Calibri" pitchFamily="34" charset="-122"/>
+                <a:cs typeface="Calibri" pitchFamily="34" charset="-120"/>
+              </a:rPr>
+              <a:t>Small businesses lose $50K annually to inefficient processes</a:t>
+            </a:r>
+            <a:endParaRPr lang="en-US" sz="1800" dirty="0"/>
           </a:p>
           <a:p>
             <a:pPr marL="342900" indent="-342900">
@@ -2885,14 +3553,17 @@
               <a:buChar char="•"/>
             </a:pPr>
             <a:r>
-              <a:rPr lang="en-US" sz="1600" dirty="0">
-                <a:solidFill>
-                  <a:srgbClr val="374151"/>
-                </a:solidFill>
-              </a:rPr>
-              <a:t>Tagline</a:t>
-            </a:r>
-            <a:endParaRPr lang="en-US" sz="1600" dirty="0"/>
+              <a:rPr lang="en-US" sz="1800" b="1" dirty="0">
+                <a:solidFill>
+                  <a:srgbClr val="1F2937"/>
+                </a:solidFill>
+                <a:latin typeface="Calibri" pitchFamily="34" charset="0"/>
+                <a:ea typeface="Calibri" pitchFamily="34" charset="-122"/>
+                <a:cs typeface="Calibri" pitchFamily="34" charset="-120"/>
+              </a:rPr>
+              <a:t>15 million businesses in the US alone face this daily</a:t>
+            </a:r>
+            <a:endParaRPr lang="en-US" sz="1800" dirty="0"/>
           </a:p>
           <a:p>
             <a:pPr marL="342900" indent="-342900">
@@ -2903,14 +3574,115 @@
               <a:buChar char="•"/>
             </a:pPr>
             <a:r>
-              <a:rPr lang="en-US" sz="1600" dirty="0">
-                <a:solidFill>
-                  <a:srgbClr val="374151"/>
-                </a:solidFill>
-              </a:rPr>
-              <a:t>Contact information</a:t>
-            </a:r>
-            <a:endParaRPr lang="en-US" sz="1600" dirty="0"/>
+              <a:rPr lang="en-US" sz="1800" b="1" dirty="0">
+                <a:solidFill>
+                  <a:srgbClr val="1F2937"/>
+                </a:solidFill>
+                <a:latin typeface="Calibri" pitchFamily="34" charset="0"/>
+                <a:ea typeface="Calibri" pitchFamily="34" charset="-122"/>
+                <a:cs typeface="Calibri" pitchFamily="34" charset="-120"/>
+              </a:rPr>
+              <a:t>Current solutions are too expensive or too complex</a:t>
+            </a:r>
+            <a:endParaRPr lang="en-US" sz="1800" dirty="0"/>
+          </a:p>
+        </p:txBody>
+      </p:sp>
+      <p:sp>
+        <p:nvSpPr>
+          <p:cNvPr id="6" name="Shape 4"/>
+          <p:cNvSpPr/>
+          <p:nvPr/>
+        </p:nvSpPr>
+        <p:spPr>
+          <a:xfrm>
+            <a:off x="0" y="6720840"/>
+            <a:ext cx="73152" cy="137160"/>
+          </a:xfrm>
+          <a:prstGeom prst="rect">
+            <a:avLst/>
+          </a:prstGeom>
+          <a:solidFill>
+            <a:srgbClr val="38BDF8"/>
+          </a:solidFill>
+          <a:ln/>
+        </p:spPr>
+      </p:sp>
+      <p:sp>
+        <p:nvSpPr>
+          <p:cNvPr id="7" name="Text 5"/>
+          <p:cNvSpPr/>
+          <p:nvPr/>
+        </p:nvSpPr>
+        <p:spPr>
+          <a:xfrm>
+            <a:off x="274320" y="6720840"/>
+            <a:ext cx="2743200" cy="137160"/>
+          </a:xfrm>
+          <a:prstGeom prst="rect">
+            <a:avLst/>
+          </a:prstGeom>
+          <a:noFill/>
+          <a:ln/>
+        </p:spPr>
+        <p:txBody>
+          <a:bodyPr wrap="square" rtlCol="0" anchor="ctr"/>
+          <a:lstStyle/>
+          <a:p>
+            <a:pPr indent="0" marL="0">
+              <a:buNone/>
+            </a:pPr>
+            <a:r>
+              <a:rPr lang="en-US" sz="1000" dirty="0">
+                <a:solidFill>
+                  <a:srgbClr val="6B7280"/>
+                </a:solidFill>
+                <a:latin typeface="Calibri" pitchFamily="34" charset="0"/>
+                <a:ea typeface="Calibri" pitchFamily="34" charset="-122"/>
+                <a:cs typeface="Calibri" pitchFamily="34" charset="-120"/>
+              </a:rPr>
+              <a:t>Creatives Takeover</a:t>
+            </a:r>
+            <a:endParaRPr lang="en-US" sz="1000" dirty="0"/>
+          </a:p>
+        </p:txBody>
+      </p:sp>
+      <p:sp>
+        <p:nvSpPr>
+          <p:cNvPr id="8" name="Text 6"/>
+          <p:cNvSpPr/>
+          <p:nvPr/>
+        </p:nvSpPr>
+        <p:spPr>
+          <a:xfrm>
+            <a:off x="8412480" y="6720840"/>
+            <a:ext cx="274320" cy="137160"/>
+          </a:xfrm>
+          <a:prstGeom prst="rect">
+            <a:avLst/>
+          </a:prstGeom>
+          <a:noFill/>
+          <a:ln/>
+        </p:spPr>
+        <p:txBody>
+          <a:bodyPr wrap="square" rtlCol="0" anchor="ctr"/>
+          <a:lstStyle/>
+          <a:p>
+            <a:pPr algn="r" indent="0" marL="0">
+              <a:buNone/>
+            </a:pPr>
+            <a:r>
+              <a:rPr lang="en-US" sz="1000" dirty="0">
+                <a:solidFill>
+                  <a:srgbClr val="6B7280"/>
+                </a:solidFill>
+                <a:latin typeface="Calibri" pitchFamily="34" charset="0"/>
+                <a:ea typeface="Calibri" pitchFamily="34" charset="-122"/>
+                <a:cs typeface="Calibri" pitchFamily="34" charset="-120"/>
+              </a:rPr>
+              <a:t>3</a:t>
+            </a:r>
+            <a:endParaRPr lang="en-US" sz="1000" dirty="0"/>
           </a:p>
         </p:txBody>
       </p:sp>
@@ -2922,9 +3694,16 @@
 </p:sld>
 </file>
 
-<file path=ppt/slides/slide3.xml><?xml version="1.0" encoding="utf-8"?>
+<file path=ppt/slides/slide4.xml><?xml version="1.0" encoding="utf-8"?>
 <p:sld xmlns:a="http://schemas.openxmlformats.org/drawingml/2006/main" xmlns:r="http://schemas.openxmlformats.org/officeDocument/2006/relationships" xmlns:p="http://schemas.openxmlformats.org/presentationml/2006/main">
-  <p:cSld name="Slide 3">
+  <p:cSld name="Slide 4">
+    <p:bg>
+      <p:bgPr>
+        <a:solidFill>
+          <a:srgbClr val="FFFFFF"/>
+        </a:solidFill>
+      </p:bgPr>
+    </p:bg>
     <p:spTree>
       <p:nvGrpSpPr>
         <p:cNvPr id="1" name=""/>
@@ -2941,14 +3720,34 @@
       </p:grpSpPr>
       <p:sp>
         <p:nvSpPr>
-          <p:cNvPr id="2" name="Text 0"/>
-          <p:cNvSpPr/>
-          <p:nvPr/>
-        </p:nvSpPr>
-        <p:spPr>
-          <a:xfrm>
-            <a:off x="457200" y="457200"/>
-            <a:ext cx="8229600" cy="685800"/>
+          <p:cNvPr id="2" name="Shape 0"/>
+          <p:cNvSpPr/>
+          <p:nvPr/>
+        </p:nvSpPr>
+        <p:spPr>
+          <a:xfrm>
+            <a:off x="0" y="0"/>
+            <a:ext cx="9144000" cy="137160"/>
+          </a:xfrm>
+          <a:prstGeom prst="rect">
+            <a:avLst/>
+          </a:prstGeom>
+          <a:solidFill>
+            <a:srgbClr val="0B1437"/>
+          </a:solidFill>
+          <a:ln/>
+        </p:spPr>
+      </p:sp>
+      <p:sp>
+        <p:nvSpPr>
+          <p:cNvPr id="3" name="Text 1"/>
+          <p:cNvSpPr/>
+          <p:nvPr/>
+        </p:nvSpPr>
+        <p:spPr>
+          <a:xfrm>
+            <a:off x="457200" y="365760"/>
+            <a:ext cx="8229600" cy="548640"/>
           </a:xfrm>
           <a:prstGeom prst="rect">
             <a:avLst/>
@@ -2968,8 +3767,11 @@
                 <a:solidFill>
                   <a:srgbClr val="0B1437"/>
                 </a:solidFill>
-              </a:rPr>
-              <a:t>Traction Highlight</a:t>
+                <a:latin typeface="Calibri" pitchFamily="34" charset="0"/>
+                <a:ea typeface="Calibri" pitchFamily="34" charset="-122"/>
+                <a:cs typeface="Calibri" pitchFamily="34" charset="-120"/>
+              </a:rPr>
+              <a:t>Our Solution</a:t>
             </a:r>
             <a:endParaRPr lang="en-US" sz="3200" dirty="0"/>
           </a:p>
@@ -2977,7 +3779,46 @@
       </p:sp>
       <p:sp>
         <p:nvSpPr>
-          <p:cNvPr id="3" name="Text 1"/>
+          <p:cNvPr id="4" name="Text 2"/>
+          <p:cNvSpPr/>
+          <p:nvPr/>
+        </p:nvSpPr>
+        <p:spPr>
+          <a:xfrm>
+            <a:off x="457200" y="914400"/>
+            <a:ext cx="8229600" cy="365760"/>
+          </a:xfrm>
+          <a:prstGeom prst="rect">
+            <a:avLst/>
+          </a:prstGeom>
+          <a:noFill/>
+          <a:ln/>
+        </p:spPr>
+        <p:txBody>
+          <a:bodyPr wrap="square" rtlCol="0" anchor="ctr"/>
+          <a:lstStyle/>
+          <a:p>
+            <a:pPr indent="0" marL="0">
+              <a:buNone/>
+            </a:pPr>
+            <a:r>
+              <a:rPr lang="en-US" sz="1600" i="1" dirty="0">
+                <a:solidFill>
+                  <a:srgbClr val="6B7280"/>
+                </a:solidFill>
+                <a:latin typeface="Calibri" pitchFamily="34" charset="0"/>
+                <a:ea typeface="Calibri" pitchFamily="34" charset="-122"/>
+                <a:cs typeface="Calibri" pitchFamily="34" charset="-120"/>
+              </a:rPr>
+              <a:t>How we solve it</a:t>
+            </a:r>
+            <a:endParaRPr lang="en-US" sz="1600" dirty="0"/>
+          </a:p>
+        </p:txBody>
+      </p:sp>
+      <p:sp>
+        <p:nvSpPr>
+          <p:cNvPr id="5" name="Text 3"/>
           <p:cNvSpPr/>
           <p:nvPr/>
         </p:nvSpPr>
@@ -3004,14 +3845,38 @@
               <a:buChar char="•"/>
             </a:pPr>
             <a:r>
-              <a:rPr lang="en-US" sz="1600" dirty="0">
-                <a:solidFill>
-                  <a:srgbClr val="374151"/>
-                </a:solidFill>
-              </a:rPr>
-              <a:t>Most impressive growth metric</a:t>
-            </a:r>
-            <a:endParaRPr lang="en-US" sz="1600" dirty="0"/>
+              <a:rPr lang="en-US" sz="1800" b="1" dirty="0">
+                <a:solidFill>
+                  <a:srgbClr val="1F2937"/>
+                </a:solidFill>
+                <a:latin typeface="Calibri" pitchFamily="34" charset="0"/>
+                <a:ea typeface="Calibri" pitchFamily="34" charset="-122"/>
+                <a:cs typeface="Calibri" pitchFamily="34" charset="-120"/>
+              </a:rPr>
+              <a:t>AI-powered automation that learns from user behavior</a:t>
+            </a:r>
+            <a:endParaRPr lang="en-US" sz="1800" dirty="0"/>
+          </a:p>
+          <a:p>
+            <a:pPr lvl="1" marL="685800" indent="-342900">
+              <a:lnSpc>
+                <a:spcPts val="2800"/>
+              </a:lnSpc>
+              <a:buSzPct val="100000"/>
+              <a:buChar char="•"/>
+            </a:pPr>
+            <a:r>
+              <a:rPr lang="en-US" sz="1800" dirty="0">
+                <a:solidFill>
+                  <a:srgbClr val="6B7280"/>
+                </a:solidFill>
+                <a:latin typeface="Calibri" pitchFamily="34" charset="0"/>
+                <a:ea typeface="Calibri" pitchFamily="34" charset="-122"/>
+                <a:cs typeface="Calibri" pitchFamily="34" charset="-120"/>
+              </a:rPr>
+              <a:t>Example: "After 3 invoices, our AI predicts payment dates with 90% accuracy"</a:t>
+            </a:r>
+            <a:endParaRPr lang="en-US" sz="1800" dirty="0"/>
           </a:p>
           <a:p>
             <a:pPr marL="342900" indent="-342900">
@@ -3022,14 +3887,17 @@
               <a:buChar char="•"/>
             </a:pPr>
             <a:r>
-              <a:rPr lang="en-US" sz="1600" dirty="0">
-                <a:solidFill>
-                  <a:srgbClr val="374151"/>
-                </a:solidFill>
-              </a:rPr>
-              <a:t>Revenue number or user count</a:t>
-            </a:r>
-            <a:endParaRPr lang="en-US" sz="1600" dirty="0"/>
+              <a:rPr lang="en-US" sz="1800" b="1" dirty="0">
+                <a:solidFill>
+                  <a:srgbClr val="1F2937"/>
+                </a:solidFill>
+                <a:latin typeface="Calibri" pitchFamily="34" charset="0"/>
+                <a:ea typeface="Calibri" pitchFamily="34" charset="-122"/>
+                <a:cs typeface="Calibri" pitchFamily="34" charset="-120"/>
+              </a:rPr>
+              <a:t>10x faster than manual processes</a:t>
+            </a:r>
+            <a:endParaRPr lang="en-US" sz="1800" dirty="0"/>
           </a:p>
           <a:p>
             <a:pPr marL="342900" indent="-342900">
@@ -3040,32 +3908,115 @@
               <a:buChar char="•"/>
             </a:pPr>
             <a:r>
-              <a:rPr lang="en-US" sz="1600" dirty="0">
-                <a:solidFill>
-                  <a:srgbClr val="374151"/>
-                </a:solidFill>
-              </a:rPr>
-              <a:t>Growth rate (MoM/YoY)</a:t>
-            </a:r>
-            <a:endParaRPr lang="en-US" sz="1600" dirty="0"/>
-          </a:p>
-          <a:p>
-            <a:pPr marL="342900" indent="-342900">
-              <a:lnSpc>
-                <a:spcPts val="2800"/>
-              </a:lnSpc>
-              <a:buSzPct val="100000"/>
-              <a:buChar char="•"/>
-            </a:pPr>
-            <a:r>
-              <a:rPr lang="en-US" sz="1600" dirty="0">
-                <a:solidFill>
-                  <a:srgbClr val="374151"/>
-                </a:solidFill>
-              </a:rPr>
-              <a:t>Comparative context</a:t>
-            </a:r>
-            <a:endParaRPr lang="en-US" sz="1600" dirty="0"/>
+              <a:rPr lang="en-US" sz="1800" b="1" dirty="0">
+                <a:solidFill>
+                  <a:srgbClr val="1F2937"/>
+                </a:solidFill>
+                <a:latin typeface="Calibri" pitchFamily="34" charset="0"/>
+                <a:ea typeface="Calibri" pitchFamily="34" charset="-122"/>
+                <a:cs typeface="Calibri" pitchFamily="34" charset="-120"/>
+              </a:rPr>
+              <a:t>50% cheaper than enterprise competitors</a:t>
+            </a:r>
+            <a:endParaRPr lang="en-US" sz="1800" dirty="0"/>
+          </a:p>
+        </p:txBody>
+      </p:sp>
+      <p:sp>
+        <p:nvSpPr>
+          <p:cNvPr id="6" name="Shape 4"/>
+          <p:cNvSpPr/>
+          <p:nvPr/>
+        </p:nvSpPr>
+        <p:spPr>
+          <a:xfrm>
+            <a:off x="0" y="6720840"/>
+            <a:ext cx="73152" cy="137160"/>
+          </a:xfrm>
+          <a:prstGeom prst="rect">
+            <a:avLst/>
+          </a:prstGeom>
+          <a:solidFill>
+            <a:srgbClr val="38BDF8"/>
+          </a:solidFill>
+          <a:ln/>
+        </p:spPr>
+      </p:sp>
+      <p:sp>
+        <p:nvSpPr>
+          <p:cNvPr id="7" name="Text 5"/>
+          <p:cNvSpPr/>
+          <p:nvPr/>
+        </p:nvSpPr>
+        <p:spPr>
+          <a:xfrm>
+            <a:off x="274320" y="6720840"/>
+            <a:ext cx="2743200" cy="137160"/>
+          </a:xfrm>
+          <a:prstGeom prst="rect">
+            <a:avLst/>
+          </a:prstGeom>
+          <a:noFill/>
+          <a:ln/>
+        </p:spPr>
+        <p:txBody>
+          <a:bodyPr wrap="square" rtlCol="0" anchor="ctr"/>
+          <a:lstStyle/>
+          <a:p>
+            <a:pPr indent="0" marL="0">
+              <a:buNone/>
+            </a:pPr>
+            <a:r>
+              <a:rPr lang="en-US" sz="1000" dirty="0">
+                <a:solidFill>
+                  <a:srgbClr val="6B7280"/>
+                </a:solidFill>
+                <a:latin typeface="Calibri" pitchFamily="34" charset="0"/>
+                <a:ea typeface="Calibri" pitchFamily="34" charset="-122"/>
+                <a:cs typeface="Calibri" pitchFamily="34" charset="-120"/>
+              </a:rPr>
+              <a:t>Creatives Takeover</a:t>
+            </a:r>
+            <a:endParaRPr lang="en-US" sz="1000" dirty="0"/>
+          </a:p>
+        </p:txBody>
+      </p:sp>
+      <p:sp>
+        <p:nvSpPr>
+          <p:cNvPr id="8" name="Text 6"/>
+          <p:cNvSpPr/>
+          <p:nvPr/>
+        </p:nvSpPr>
+        <p:spPr>
+          <a:xfrm>
+            <a:off x="8412480" y="6720840"/>
+            <a:ext cx="274320" cy="137160"/>
+          </a:xfrm>
+          <a:prstGeom prst="rect">
+            <a:avLst/>
+          </a:prstGeom>
+          <a:noFill/>
+          <a:ln/>
+        </p:spPr>
+        <p:txBody>
+          <a:bodyPr wrap="square" rtlCol="0" anchor="ctr"/>
+          <a:lstStyle/>
+          <a:p>
+            <a:pPr algn="r" indent="0" marL="0">
+              <a:buNone/>
+            </a:pPr>
+            <a:r>
+              <a:rPr lang="en-US" sz="1000" dirty="0">
+                <a:solidFill>
+                  <a:srgbClr val="6B7280"/>
+                </a:solidFill>
+                <a:latin typeface="Calibri" pitchFamily="34" charset="0"/>
+                <a:ea typeface="Calibri" pitchFamily="34" charset="-122"/>
+                <a:cs typeface="Calibri" pitchFamily="34" charset="-120"/>
+              </a:rPr>
+              <a:t>4</a:t>
+            </a:r>
+            <a:endParaRPr lang="en-US" sz="1000" dirty="0"/>
           </a:p>
         </p:txBody>
       </p:sp>
@@ -3077,9 +4028,16 @@
 </p:sld>
 </file>
 
-<file path=ppt/slides/slide4.xml><?xml version="1.0" encoding="utf-8"?>
+<file path=ppt/slides/slide5.xml><?xml version="1.0" encoding="utf-8"?>
 <p:sld xmlns:a="http://schemas.openxmlformats.org/drawingml/2006/main" xmlns:r="http://schemas.openxmlformats.org/officeDocument/2006/relationships" xmlns:p="http://schemas.openxmlformats.org/presentationml/2006/main">
-  <p:cSld name="Slide 4">
+  <p:cSld name="Slide 5">
+    <p:bg>
+      <p:bgPr>
+        <a:solidFill>
+          <a:srgbClr val="FFFFFF"/>
+        </a:solidFill>
+      </p:bgPr>
+    </p:bg>
     <p:spTree>
       <p:nvGrpSpPr>
         <p:cNvPr id="1" name=""/>
@@ -3096,14 +4054,34 @@
       </p:grpSpPr>
       <p:sp>
         <p:nvSpPr>
-          <p:cNvPr id="2" name="Text 0"/>
-          <p:cNvSpPr/>
-          <p:nvPr/>
-        </p:nvSpPr>
-        <p:spPr>
-          <a:xfrm>
-            <a:off x="457200" y="457200"/>
-            <a:ext cx="8229600" cy="685800"/>
+          <p:cNvPr id="2" name="Shape 0"/>
+          <p:cNvSpPr/>
+          <p:nvPr/>
+        </p:nvSpPr>
+        <p:spPr>
+          <a:xfrm>
+            <a:off x="0" y="0"/>
+            <a:ext cx="9144000" cy="137160"/>
+          </a:xfrm>
+          <a:prstGeom prst="rect">
+            <a:avLst/>
+          </a:prstGeom>
+          <a:solidFill>
+            <a:srgbClr val="0B1437"/>
+          </a:solidFill>
+          <a:ln/>
+        </p:spPr>
+      </p:sp>
+      <p:sp>
+        <p:nvSpPr>
+          <p:cNvPr id="3" name="Text 1"/>
+          <p:cNvSpPr/>
+          <p:nvPr/>
+        </p:nvSpPr>
+        <p:spPr>
+          <a:xfrm>
+            <a:off x="457200" y="365760"/>
+            <a:ext cx="8229600" cy="548640"/>
           </a:xfrm>
           <a:prstGeom prst="rect">
             <a:avLst/>
@@ -3123,8 +4101,11 @@
                 <a:solidFill>
                   <a:srgbClr val="0B1437"/>
                 </a:solidFill>
-              </a:rPr>
-              <a:t>Problem</a:t>
+                <a:latin typeface="Calibri" pitchFamily="34" charset="0"/>
+                <a:ea typeface="Calibri" pitchFamily="34" charset="-122"/>
+                <a:cs typeface="Calibri" pitchFamily="34" charset="-120"/>
+              </a:rPr>
+              <a:t>Market Opportunity</a:t>
             </a:r>
             <a:endParaRPr lang="en-US" sz="3200" dirty="0"/>
           </a:p>
@@ -3132,7 +4113,46 @@
       </p:sp>
       <p:sp>
         <p:nvSpPr>
-          <p:cNvPr id="3" name="Text 1"/>
+          <p:cNvPr id="4" name="Text 2"/>
+          <p:cNvSpPr/>
+          <p:nvPr/>
+        </p:nvSpPr>
+        <p:spPr>
+          <a:xfrm>
+            <a:off x="457200" y="914400"/>
+            <a:ext cx="8229600" cy="365760"/>
+          </a:xfrm>
+          <a:prstGeom prst="rect">
+            <a:avLst/>
+          </a:prstGeom>
+          <a:noFill/>
+          <a:ln/>
+        </p:spPr>
+        <p:txBody>
+          <a:bodyPr wrap="square" rtlCol="0" anchor="ctr"/>
+          <a:lstStyle/>
+          <a:p>
+            <a:pPr indent="0" marL="0">
+              <a:buNone/>
+            </a:pPr>
+            <a:r>
+              <a:rPr lang="en-US" sz="1600" i="1" dirty="0">
+                <a:solidFill>
+                  <a:srgbClr val="6B7280"/>
+                </a:solidFill>
+                <a:latin typeface="Calibri" pitchFamily="34" charset="0"/>
+                <a:ea typeface="Calibri" pitchFamily="34" charset="-122"/>
+                <a:cs typeface="Calibri" pitchFamily="34" charset="-120"/>
+              </a:rPr>
+              <a:t>$50B total addressable market</a:t>
+            </a:r>
+            <a:endParaRPr lang="en-US" sz="1600" dirty="0"/>
+          </a:p>
+        </p:txBody>
+      </p:sp>
+      <p:sp>
+        <p:nvSpPr>
+          <p:cNvPr id="5" name="Text 3"/>
           <p:cNvSpPr/>
           <p:nvPr/>
         </p:nvSpPr>
@@ -3159,14 +4179,17 @@
               <a:buChar char="•"/>
             </a:pPr>
             <a:r>
-              <a:rPr lang="en-US" sz="1600" dirty="0">
-                <a:solidFill>
-                  <a:srgbClr val="374151"/>
-                </a:solidFill>
-              </a:rPr>
-              <a:t>The pain point</a:t>
-            </a:r>
-            <a:endParaRPr lang="en-US" sz="1600" dirty="0"/>
+              <a:rPr lang="en-US" sz="1800" b="1" dirty="0">
+                <a:solidFill>
+                  <a:srgbClr val="1F2937"/>
+                </a:solidFill>
+                <a:latin typeface="Calibri" pitchFamily="34" charset="0"/>
+                <a:ea typeface="Calibri" pitchFamily="34" charset="-122"/>
+                <a:cs typeface="Calibri" pitchFamily="34" charset="-120"/>
+              </a:rPr>
+              <a:t>TAM: $50B (all small business accounting software)</a:t>
+            </a:r>
+            <a:endParaRPr lang="en-US" sz="1800" dirty="0"/>
           </a:p>
           <a:p>
             <a:pPr marL="342900" indent="-342900">
@@ -3177,14 +4200,17 @@
               <a:buChar char="•"/>
             </a:pPr>
             <a:r>
-              <a:rPr lang="en-US" sz="1600" dirty="0">
-                <a:solidFill>
-                  <a:srgbClr val="374151"/>
-                </a:solidFill>
-              </a:rPr>
-              <a:t>Market validation of problem</a:t>
-            </a:r>
-            <a:endParaRPr lang="en-US" sz="1600" dirty="0"/>
+              <a:rPr lang="en-US" sz="1800" b="1" dirty="0">
+                <a:solidFill>
+                  <a:srgbClr val="1F2937"/>
+                </a:solidFill>
+                <a:latin typeface="Calibri" pitchFamily="34" charset="0"/>
+                <a:ea typeface="Calibri" pitchFamily="34" charset="-122"/>
+                <a:cs typeface="Calibri" pitchFamily="34" charset="-120"/>
+              </a:rPr>
+              <a:t>SAM: $5B (invoicing and payments segment)</a:t>
+            </a:r>
+            <a:endParaRPr lang="en-US" sz="1800" dirty="0"/>
           </a:p>
           <a:p>
             <a:pPr marL="342900" indent="-342900">
@@ -3195,14 +4221,115 @@
               <a:buChar char="•"/>
             </a:pPr>
             <a:r>
-              <a:rPr lang="en-US" sz="1600" dirty="0">
-                <a:solidFill>
-                  <a:srgbClr val="374151"/>
-                </a:solidFill>
-              </a:rPr>
-              <a:t>Current broken solutions</a:t>
-            </a:r>
-            <a:endParaRPr lang="en-US" sz="1600" dirty="0"/>
+              <a:rPr lang="en-US" sz="1800" b="1" dirty="0">
+                <a:solidFill>
+                  <a:srgbClr val="1F2937"/>
+                </a:solidFill>
+                <a:latin typeface="Calibri" pitchFamily="34" charset="0"/>
+                <a:ea typeface="Calibri" pitchFamily="34" charset="-122"/>
+                <a:cs typeface="Calibri" pitchFamily="34" charset="-120"/>
+              </a:rPr>
+              <a:t>SOM: $100M target in 5 years (2% of SAM)</a:t>
+            </a:r>
+            <a:endParaRPr lang="en-US" sz="1800" dirty="0"/>
+          </a:p>
+        </p:txBody>
+      </p:sp>
+      <p:sp>
+        <p:nvSpPr>
+          <p:cNvPr id="6" name="Shape 4"/>
+          <p:cNvSpPr/>
+          <p:nvPr/>
+        </p:nvSpPr>
+        <p:spPr>
+          <a:xfrm>
+            <a:off x="0" y="6720840"/>
+            <a:ext cx="73152" cy="137160"/>
+          </a:xfrm>
+          <a:prstGeom prst="rect">
+            <a:avLst/>
+          </a:prstGeom>
+          <a:solidFill>
+            <a:srgbClr val="38BDF8"/>
+          </a:solidFill>
+          <a:ln/>
+        </p:spPr>
+      </p:sp>
+      <p:sp>
+        <p:nvSpPr>
+          <p:cNvPr id="7" name="Text 5"/>
+          <p:cNvSpPr/>
+          <p:nvPr/>
+        </p:nvSpPr>
+        <p:spPr>
+          <a:xfrm>
+            <a:off x="274320" y="6720840"/>
+            <a:ext cx="2743200" cy="137160"/>
+          </a:xfrm>
+          <a:prstGeom prst="rect">
+            <a:avLst/>
+          </a:prstGeom>
+          <a:noFill/>
+          <a:ln/>
+        </p:spPr>
+        <p:txBody>
+          <a:bodyPr wrap="square" rtlCol="0" anchor="ctr"/>
+          <a:lstStyle/>
+          <a:p>
+            <a:pPr indent="0" marL="0">
+              <a:buNone/>
+            </a:pPr>
+            <a:r>
+              <a:rPr lang="en-US" sz="1000" dirty="0">
+                <a:solidFill>
+                  <a:srgbClr val="6B7280"/>
+                </a:solidFill>
+                <a:latin typeface="Calibri" pitchFamily="34" charset="0"/>
+                <a:ea typeface="Calibri" pitchFamily="34" charset="-122"/>
+                <a:cs typeface="Calibri" pitchFamily="34" charset="-120"/>
+              </a:rPr>
+              <a:t>Creatives Takeover</a:t>
+            </a:r>
+            <a:endParaRPr lang="en-US" sz="1000" dirty="0"/>
+          </a:p>
+        </p:txBody>
+      </p:sp>
+      <p:sp>
+        <p:nvSpPr>
+          <p:cNvPr id="8" name="Text 6"/>
+          <p:cNvSpPr/>
+          <p:nvPr/>
+        </p:nvSpPr>
+        <p:spPr>
+          <a:xfrm>
+            <a:off x="8412480" y="6720840"/>
+            <a:ext cx="274320" cy="137160"/>
+          </a:xfrm>
+          <a:prstGeom prst="rect">
+            <a:avLst/>
+          </a:prstGeom>
+          <a:noFill/>
+          <a:ln/>
+        </p:spPr>
+        <p:txBody>
+          <a:bodyPr wrap="square" rtlCol="0" anchor="ctr"/>
+          <a:lstStyle/>
+          <a:p>
+            <a:pPr algn="r" indent="0" marL="0">
+              <a:buNone/>
+            </a:pPr>
+            <a:r>
+              <a:rPr lang="en-US" sz="1000" dirty="0">
+                <a:solidFill>
+                  <a:srgbClr val="6B7280"/>
+                </a:solidFill>
+                <a:latin typeface="Calibri" pitchFamily="34" charset="0"/>
+                <a:ea typeface="Calibri" pitchFamily="34" charset="-122"/>
+                <a:cs typeface="Calibri" pitchFamily="34" charset="-120"/>
+              </a:rPr>
+              <a:t>5</a:t>
+            </a:r>
+            <a:endParaRPr lang="en-US" sz="1000" dirty="0"/>
           </a:p>
         </p:txBody>
       </p:sp>
@@ -3214,9 +4341,16 @@
 </p:sld>
 </file>
 
-<file path=ppt/slides/slide5.xml><?xml version="1.0" encoding="utf-8"?>
+<file path=ppt/slides/slide6.xml><?xml version="1.0" encoding="utf-8"?>
 <p:sld xmlns:a="http://schemas.openxmlformats.org/drawingml/2006/main" xmlns:r="http://schemas.openxmlformats.org/officeDocument/2006/relationships" xmlns:p="http://schemas.openxmlformats.org/presentationml/2006/main">
-  <p:cSld name="Slide 5">
+  <p:cSld name="Slide 6">
+    <p:bg>
+      <p:bgPr>
+        <a:solidFill>
+          <a:srgbClr val="FFFFFF"/>
+        </a:solidFill>
+      </p:bgPr>
+    </p:bg>
     <p:spTree>
       <p:nvGrpSpPr>
         <p:cNvPr id="1" name=""/>
@@ -3233,14 +4367,34 @@
       </p:grpSpPr>
       <p:sp>
         <p:nvSpPr>
-          <p:cNvPr id="2" name="Text 0"/>
-          <p:cNvSpPr/>
-          <p:nvPr/>
-        </p:nvSpPr>
-        <p:spPr>
-          <a:xfrm>
-            <a:off x="457200" y="457200"/>
-            <a:ext cx="8229600" cy="685800"/>
+          <p:cNvPr id="2" name="Shape 0"/>
+          <p:cNvSpPr/>
+          <p:nvPr/>
+        </p:nvSpPr>
+        <p:spPr>
+          <a:xfrm>
+            <a:off x="0" y="0"/>
+            <a:ext cx="9144000" cy="137160"/>
+          </a:xfrm>
+          <a:prstGeom prst="rect">
+            <a:avLst/>
+          </a:prstGeom>
+          <a:solidFill>
+            <a:srgbClr val="0B1437"/>
+          </a:solidFill>
+          <a:ln/>
+        </p:spPr>
+      </p:sp>
+      <p:sp>
+        <p:nvSpPr>
+          <p:cNvPr id="3" name="Text 1"/>
+          <p:cNvSpPr/>
+          <p:nvPr/>
+        </p:nvSpPr>
+        <p:spPr>
+          <a:xfrm>
+            <a:off x="457200" y="365760"/>
+            <a:ext cx="8229600" cy="548640"/>
           </a:xfrm>
           <a:prstGeom prst="rect">
             <a:avLst/>
@@ -3260,8 +4414,11 @@
                 <a:solidFill>
                   <a:srgbClr val="0B1437"/>
                 </a:solidFill>
-              </a:rPr>
-              <a:t>Solution</a:t>
+                <a:latin typeface="Calibri" pitchFamily="34" charset="0"/>
+                <a:ea typeface="Calibri" pitchFamily="34" charset="-122"/>
+                <a:cs typeface="Calibri" pitchFamily="34" charset="-120"/>
+              </a:rPr>
+              <a:t>Business Model</a:t>
             </a:r>
             <a:endParaRPr lang="en-US" sz="3200" dirty="0"/>
           </a:p>
@@ -3269,7 +4426,46 @@
       </p:sp>
       <p:sp>
         <p:nvSpPr>
-          <p:cNvPr id="3" name="Text 1"/>
+          <p:cNvPr id="4" name="Text 2"/>
+          <p:cNvSpPr/>
+          <p:nvPr/>
+        </p:nvSpPr>
+        <p:spPr>
+          <a:xfrm>
+            <a:off x="457200" y="914400"/>
+            <a:ext cx="8229600" cy="365760"/>
+          </a:xfrm>
+          <a:prstGeom prst="rect">
+            <a:avLst/>
+          </a:prstGeom>
+          <a:noFill/>
+          <a:ln/>
+        </p:spPr>
+        <p:txBody>
+          <a:bodyPr wrap="square" rtlCol="0" anchor="ctr"/>
+          <a:lstStyle/>
+          <a:p>
+            <a:pPr indent="0" marL="0">
+              <a:buNone/>
+            </a:pPr>
+            <a:r>
+              <a:rPr lang="en-US" sz="1600" i="1" dirty="0">
+                <a:solidFill>
+                  <a:srgbClr val="6B7280"/>
+                </a:solidFill>
+                <a:latin typeface="Calibri" pitchFamily="34" charset="0"/>
+                <a:ea typeface="Calibri" pitchFamily="34" charset="-122"/>
+                <a:cs typeface="Calibri" pitchFamily="34" charset="-120"/>
+              </a:rPr>
+              <a:t>SaaS subscription with strong unit economics</a:t>
+            </a:r>
+            <a:endParaRPr lang="en-US" sz="1600" dirty="0"/>
+          </a:p>
+        </p:txBody>
+      </p:sp>
+      <p:sp>
+        <p:nvSpPr>
+          <p:cNvPr id="5" name="Text 3"/>
           <p:cNvSpPr/>
           <p:nvPr/>
         </p:nvSpPr>
@@ -3296,14 +4492,17 @@
               <a:buChar char="•"/>
             </a:pPr>
             <a:r>
-              <a:rPr lang="en-US" sz="1600" dirty="0">
-                <a:solidFill>
-                  <a:srgbClr val="374151"/>
-                </a:solidFill>
-              </a:rPr>
-              <a:t>How you solve it differently</a:t>
-            </a:r>
-            <a:endParaRPr lang="en-US" sz="1600" dirty="0"/>
+              <a:rPr lang="en-US" sz="1800" b="1" dirty="0">
+                <a:solidFill>
+                  <a:srgbClr val="1F2937"/>
+                </a:solidFill>
+                <a:latin typeface="Calibri" pitchFamily="34" charset="0"/>
+                <a:ea typeface="Calibri" pitchFamily="34" charset="-122"/>
+                <a:cs typeface="Calibri" pitchFamily="34" charset="-120"/>
+              </a:rPr>
+              <a:t>Pricing: $49/month per user</a:t>
+            </a:r>
+            <a:endParaRPr lang="en-US" sz="1800" dirty="0"/>
           </a:p>
           <a:p>
             <a:pPr marL="342900" indent="-342900">
@@ -3314,14 +4513,17 @@
               <a:buChar char="•"/>
             </a:pPr>
             <a:r>
-              <a:rPr lang="en-US" sz="1600" dirty="0">
-                <a:solidFill>
-                  <a:srgbClr val="374151"/>
-                </a:solidFill>
-              </a:rPr>
-              <a:t>Core product functionality</a:t>
-            </a:r>
-            <a:endParaRPr lang="en-US" sz="1600" dirty="0"/>
+              <a:rPr lang="en-US" sz="1800" b="1" dirty="0">
+                <a:solidFill>
+                  <a:srgbClr val="1F2937"/>
+                </a:solidFill>
+                <a:latin typeface="Calibri" pitchFamily="34" charset="0"/>
+                <a:ea typeface="Calibri" pitchFamily="34" charset="-122"/>
+                <a:cs typeface="Calibri" pitchFamily="34" charset="-120"/>
+              </a:rPr>
+              <a:t>CAC: $250 (organic + paid marketing)</a:t>
+            </a:r>
+            <a:endParaRPr lang="en-US" sz="1800" dirty="0"/>
           </a:p>
           <a:p>
             <a:pPr marL="342900" indent="-342900">
@@ -3332,14 +4534,157 @@
               <a:buChar char="•"/>
             </a:pPr>
             <a:r>
-              <a:rPr lang="en-US" sz="1600" dirty="0">
-                <a:solidFill>
-                  <a:srgbClr val="374151"/>
-                </a:solidFill>
-              </a:rPr>
-              <a:t>Key innovation</a:t>
-            </a:r>
-            <a:endParaRPr lang="en-US" sz="1600" dirty="0"/>
+              <a:rPr lang="en-US" sz="1800" b="1" dirty="0">
+                <a:solidFill>
+                  <a:srgbClr val="1F2937"/>
+                </a:solidFill>
+                <a:latin typeface="Calibri" pitchFamily="34" charset="0"/>
+                <a:ea typeface="Calibri" pitchFamily="34" charset="-122"/>
+                <a:cs typeface="Calibri" pitchFamily="34" charset="-120"/>
+              </a:rPr>
+              <a:t>LTV: $1,764 (3-year avg retention)</a:t>
+            </a:r>
+            <a:endParaRPr lang="en-US" sz="1800" dirty="0"/>
+          </a:p>
+          <a:p>
+            <a:pPr marL="342900" indent="-342900">
+              <a:lnSpc>
+                <a:spcPts val="2800"/>
+              </a:lnSpc>
+              <a:buSzPct val="100000"/>
+              <a:buChar char="•"/>
+            </a:pPr>
+            <a:r>
+              <a:rPr lang="en-US" sz="1800" b="1" dirty="0">
+                <a:solidFill>
+                  <a:srgbClr val="10B981"/>
+                </a:solidFill>
+                <a:latin typeface="Calibri" pitchFamily="34" charset="0"/>
+                <a:ea typeface="Calibri" pitchFamily="34" charset="-122"/>
+                <a:cs typeface="Calibri" pitchFamily="34" charset="-120"/>
+              </a:rPr>
+              <a:t>LTV:CAC = 7:1 (industry benchmark: 3:1)</a:t>
+            </a:r>
+            <a:endParaRPr lang="en-US" sz="1800" dirty="0"/>
+          </a:p>
+          <a:p>
+            <a:pPr marL="342900" indent="-342900">
+              <a:lnSpc>
+                <a:spcPts val="2800"/>
+              </a:lnSpc>
+              <a:buSzPct val="100000"/>
+              <a:buChar char="•"/>
+            </a:pPr>
+            <a:r>
+              <a:rPr lang="en-US" sz="1800" b="1" dirty="0">
+                <a:solidFill>
+                  <a:srgbClr val="1F2937"/>
+                </a:solidFill>
+                <a:latin typeface="Calibri" pitchFamily="34" charset="0"/>
+                <a:ea typeface="Calibri" pitchFamily="34" charset="-122"/>
+                <a:cs typeface="Calibri" pitchFamily="34" charset="-120"/>
+              </a:rPr>
+              <a:t>Payback period: 5 months</a:t>
+            </a:r>
+            <a:endParaRPr lang="en-US" sz="1800" dirty="0"/>
+          </a:p>
+        </p:txBody>
+      </p:sp>
+      <p:sp>
+        <p:nvSpPr>
+          <p:cNvPr id="6" name="Shape 4"/>
+          <p:cNvSpPr/>
+          <p:nvPr/>
+        </p:nvSpPr>
+        <p:spPr>
+          <a:xfrm>
+            <a:off x="0" y="6720840"/>
+            <a:ext cx="73152" cy="137160"/>
+          </a:xfrm>
+          <a:prstGeom prst="rect">
+            <a:avLst/>
+          </a:prstGeom>
+          <a:solidFill>
+            <a:srgbClr val="38BDF8"/>
+          </a:solidFill>
+          <a:ln/>
+        </p:spPr>
+      </p:sp>
+      <p:sp>
+        <p:nvSpPr>
+          <p:cNvPr id="7" name="Text 5"/>
+          <p:cNvSpPr/>
+          <p:nvPr/>
+        </p:nvSpPr>
+        <p:spPr>
+          <a:xfrm>
+            <a:off x="274320" y="6720840"/>
+            <a:ext cx="2743200" cy="137160"/>
+          </a:xfrm>
+          <a:prstGeom prst="rect">
+            <a:avLst/>
+          </a:prstGeom>
+          <a:noFill/>
+          <a:ln/>
+        </p:spPr>
+        <p:txBody>
+          <a:bodyPr wrap="square" rtlCol="0" anchor="ctr"/>
+          <a:lstStyle/>
+          <a:p>
+            <a:pPr indent="0" marL="0">
+              <a:buNone/>
+            </a:pPr>
+            <a:r>
+              <a:rPr lang="en-US" sz="1000" dirty="0">
+                <a:solidFill>
+                  <a:srgbClr val="6B7280"/>
+                </a:solidFill>
+                <a:latin typeface="Calibri" pitchFamily="34" charset="0"/>
+                <a:ea typeface="Calibri" pitchFamily="34" charset="-122"/>
+                <a:cs typeface="Calibri" pitchFamily="34" charset="-120"/>
+              </a:rPr>
+              <a:t>Creatives Takeover</a:t>
+            </a:r>
+            <a:endParaRPr lang="en-US" sz="1000" dirty="0"/>
+          </a:p>
+        </p:txBody>
+      </p:sp>
+      <p:sp>
+        <p:nvSpPr>
+          <p:cNvPr id="8" name="Text 6"/>
+          <p:cNvSpPr/>
+          <p:nvPr/>
+        </p:nvSpPr>
+        <p:spPr>
+          <a:xfrm>
+            <a:off x="8412480" y="6720840"/>
+            <a:ext cx="274320" cy="137160"/>
+          </a:xfrm>
+          <a:prstGeom prst="rect">
+            <a:avLst/>
+          </a:prstGeom>
+          <a:noFill/>
+          <a:ln/>
+        </p:spPr>
+        <p:txBody>
+          <a:bodyPr wrap="square" rtlCol="0" anchor="ctr"/>
+          <a:lstStyle/>
+          <a:p>
+            <a:pPr algn="r" indent="0" marL="0">
+              <a:buNone/>
+            </a:pPr>
+            <a:r>
+              <a:rPr lang="en-US" sz="1000" dirty="0">
+                <a:solidFill>
+                  <a:srgbClr val="6B7280"/>
+                </a:solidFill>
+                <a:latin typeface="Calibri" pitchFamily="34" charset="0"/>
+                <a:ea typeface="Calibri" pitchFamily="34" charset="-122"/>
+                <a:cs typeface="Calibri" pitchFamily="34" charset="-120"/>
+              </a:rPr>
+              <a:t>6</a:t>
+            </a:r>
+            <a:endParaRPr lang="en-US" sz="1000" dirty="0"/>
           </a:p>
         </p:txBody>
       </p:sp>
@@ -3351,9 +4696,16 @@
 </p:sld>
 </file>
 
-<file path=ppt/slides/slide6.xml><?xml version="1.0" encoding="utf-8"?>
+<file path=ppt/slides/slide7.xml><?xml version="1.0" encoding="utf-8"?>
 <p:sld xmlns:a="http://schemas.openxmlformats.org/drawingml/2006/main" xmlns:r="http://schemas.openxmlformats.org/officeDocument/2006/relationships" xmlns:p="http://schemas.openxmlformats.org/presentationml/2006/main">
-  <p:cSld name="Slide 6">
+  <p:cSld name="Slide 7">
+    <p:bg>
+      <p:bgPr>
+        <a:solidFill>
+          <a:srgbClr val="FFFFFF"/>
+        </a:solidFill>
+      </p:bgPr>
+    </p:bg>
     <p:spTree>
       <p:nvGrpSpPr>
         <p:cNvPr id="1" name=""/>
@@ -3370,14 +4722,34 @@
       </p:grpSpPr>
       <p:sp>
         <p:nvSpPr>
-          <p:cNvPr id="2" name="Text 0"/>
-          <p:cNvSpPr/>
-          <p:nvPr/>
-        </p:nvSpPr>
-        <p:spPr>
-          <a:xfrm>
-            <a:off x="457200" y="457200"/>
-            <a:ext cx="8229600" cy="685800"/>
+          <p:cNvPr id="2" name="Shape 0"/>
+          <p:cNvSpPr/>
+          <p:nvPr/>
+        </p:nvSpPr>
+        <p:spPr>
+          <a:xfrm>
+            <a:off x="0" y="0"/>
+            <a:ext cx="9144000" cy="137160"/>
+          </a:xfrm>
+          <a:prstGeom prst="rect">
+            <a:avLst/>
+          </a:prstGeom>
+          <a:solidFill>
+            <a:srgbClr val="0B1437"/>
+          </a:solidFill>
+          <a:ln/>
+        </p:spPr>
+      </p:sp>
+      <p:sp>
+        <p:nvSpPr>
+          <p:cNvPr id="3" name="Text 1"/>
+          <p:cNvSpPr/>
+          <p:nvPr/>
+        </p:nvSpPr>
+        <p:spPr>
+          <a:xfrm>
+            <a:off x="457200" y="365760"/>
+            <a:ext cx="8229600" cy="548640"/>
           </a:xfrm>
           <a:prstGeom prst="rect">
             <a:avLst/>
@@ -3397,8 +4769,11 @@
                 <a:solidFill>
                   <a:srgbClr val="0B1437"/>
                 </a:solidFill>
-              </a:rPr>
-              <a:t>Detailed Metrics</a:t>
+                <a:latin typeface="Calibri" pitchFamily="34" charset="0"/>
+                <a:ea typeface="Calibri" pitchFamily="34" charset="-122"/>
+                <a:cs typeface="Calibri" pitchFamily="34" charset="-120"/>
+              </a:rPr>
+              <a:t>Product Demo</a:t>
             </a:r>
             <a:endParaRPr lang="en-US" sz="3200" dirty="0"/>
           </a:p>
@@ -3406,7 +4781,46 @@
       </p:sp>
       <p:sp>
         <p:nvSpPr>
-          <p:cNvPr id="3" name="Text 1"/>
+          <p:cNvPr id="4" name="Text 2"/>
+          <p:cNvSpPr/>
+          <p:nvPr/>
+        </p:nvSpPr>
+        <p:spPr>
+          <a:xfrm>
+            <a:off x="457200" y="914400"/>
+            <a:ext cx="8229600" cy="365760"/>
+          </a:xfrm>
+          <a:prstGeom prst="rect">
+            <a:avLst/>
+          </a:prstGeom>
+          <a:noFill/>
+          <a:ln/>
+        </p:spPr>
+        <p:txBody>
+          <a:bodyPr wrap="square" rtlCol="0" anchor="ctr"/>
+          <a:lstStyle/>
+          <a:p>
+            <a:pPr indent="0" marL="0">
+              <a:buNone/>
+            </a:pPr>
+            <a:r>
+              <a:rPr lang="en-US" sz="1600" i="1" dirty="0">
+                <a:solidFill>
+                  <a:srgbClr val="6B7280"/>
+                </a:solidFill>
+                <a:latin typeface="Calibri" pitchFamily="34" charset="0"/>
+                <a:ea typeface="Calibri" pitchFamily="34" charset="-122"/>
+                <a:cs typeface="Calibri" pitchFamily="34" charset="-120"/>
+              </a:rPr>
+              <a:t>See it in action</a:t>
+            </a:r>
+            <a:endParaRPr lang="en-US" sz="1600" dirty="0"/>
+          </a:p>
+        </p:txBody>
+      </p:sp>
+      <p:sp>
+        <p:nvSpPr>
+          <p:cNvPr id="5" name="Text 3"/>
           <p:cNvSpPr/>
           <p:nvPr/>
         </p:nvSpPr>
@@ -3433,14 +4847,17 @@
               <a:buChar char="•"/>
             </a:pPr>
             <a:r>
-              <a:rPr lang="en-US" sz="1600" dirty="0">
-                <a:solidFill>
-                  <a:srgbClr val="374151"/>
-                </a:solidFill>
-              </a:rPr>
-              <a:t>Revenue metrics</a:t>
-            </a:r>
-            <a:endParaRPr lang="en-US" sz="1600" dirty="0"/>
+              <a:rPr lang="en-US" sz="1800" b="1" dirty="0">
+                <a:solidFill>
+                  <a:srgbClr val="1F2937"/>
+                </a:solidFill>
+                <a:latin typeface="Calibri" pitchFamily="34" charset="0"/>
+                <a:ea typeface="Calibri" pitchFamily="34" charset="-122"/>
+                <a:cs typeface="Calibri" pitchFamily="34" charset="-120"/>
+              </a:rPr>
+              <a:t>Include product screenshots or demo video here</a:t>
+            </a:r>
+            <a:endParaRPr lang="en-US" sz="1800" dirty="0"/>
           </a:p>
           <a:p>
             <a:pPr marL="342900" indent="-342900">
@@ -3451,14 +4868,17 @@
               <a:buChar char="•"/>
             </a:pPr>
             <a:r>
-              <a:rPr lang="en-US" sz="1600" dirty="0">
-                <a:solidFill>
-                  <a:srgbClr val="374151"/>
-                </a:solidFill>
-              </a:rPr>
-              <a:t>User metrics</a:t>
-            </a:r>
-            <a:endParaRPr lang="en-US" sz="1600" dirty="0"/>
+              <a:rPr lang="en-US" sz="1800" b="1" dirty="0">
+                <a:solidFill>
+                  <a:srgbClr val="1F2937"/>
+                </a:solidFill>
+                <a:latin typeface="Calibri" pitchFamily="34" charset="0"/>
+                <a:ea typeface="Calibri" pitchFamily="34" charset="-122"/>
+                <a:cs typeface="Calibri" pitchFamily="34" charset="-120"/>
+              </a:rPr>
+              <a:t>Show the user journey from signup to first invoice sent</a:t>
+            </a:r>
+            <a:endParaRPr lang="en-US" sz="1800" dirty="0"/>
           </a:p>
           <a:p>
             <a:pPr marL="342900" indent="-342900">
@@ -3469,50 +4889,115 @@
               <a:buChar char="•"/>
             </a:pPr>
             <a:r>
-              <a:rPr lang="en-US" sz="1600" dirty="0">
-                <a:solidFill>
-                  <a:srgbClr val="374151"/>
-                </a:solidFill>
-              </a:rPr>
-              <a:t>Engagement metrics</a:t>
-            </a:r>
-            <a:endParaRPr lang="en-US" sz="1600" dirty="0"/>
-          </a:p>
-          <a:p>
-            <a:pPr marL="342900" indent="-342900">
-              <a:lnSpc>
-                <a:spcPts val="2800"/>
-              </a:lnSpc>
-              <a:buSzPct val="100000"/>
-              <a:buChar char="•"/>
-            </a:pPr>
-            <a:r>
-              <a:rPr lang="en-US" sz="1600" dirty="0">
-                <a:solidFill>
-                  <a:srgbClr val="374151"/>
-                </a:solidFill>
-              </a:rPr>
-              <a:t>Retention metrics</a:t>
-            </a:r>
-            <a:endParaRPr lang="en-US" sz="1600" dirty="0"/>
-          </a:p>
-          <a:p>
-            <a:pPr marL="342900" indent="-342900">
-              <a:lnSpc>
-                <a:spcPts val="2800"/>
-              </a:lnSpc>
-              <a:buSzPct val="100000"/>
-              <a:buChar char="•"/>
-            </a:pPr>
-            <a:r>
-              <a:rPr lang="en-US" sz="1600" dirty="0">
-                <a:solidFill>
-                  <a:srgbClr val="374151"/>
-                </a:solidFill>
-              </a:rPr>
-              <a:t>Growth trajectory</a:t>
-            </a:r>
-            <a:endParaRPr lang="en-US" sz="1600" dirty="0"/>
+              <a:rPr lang="en-US" sz="1800" b="1" dirty="0">
+                <a:solidFill>
+                  <a:srgbClr val="1F2937"/>
+                </a:solidFill>
+                <a:latin typeface="Calibri" pitchFamily="34" charset="0"/>
+                <a:ea typeface="Calibri" pitchFamily="34" charset="-122"/>
+                <a:cs typeface="Calibri" pitchFamily="34" charset="-120"/>
+              </a:rPr>
+              <a:t>Highlight key features: templates, automation, analytics</a:t>
+            </a:r>
+            <a:endParaRPr lang="en-US" sz="1800" dirty="0"/>
+          </a:p>
+        </p:txBody>
+      </p:sp>
+      <p:sp>
+        <p:nvSpPr>
+          <p:cNvPr id="6" name="Shape 4"/>
+          <p:cNvSpPr/>
+          <p:nvPr/>
+        </p:nvSpPr>
+        <p:spPr>
+          <a:xfrm>
+            <a:off x="0" y="6720840"/>
+            <a:ext cx="73152" cy="137160"/>
+          </a:xfrm>
+          <a:prstGeom prst="rect">
+            <a:avLst/>
+          </a:prstGeom>
+          <a:solidFill>
+            <a:srgbClr val="38BDF8"/>
+          </a:solidFill>
+          <a:ln/>
+        </p:spPr>
+      </p:sp>
+      <p:sp>
+        <p:nvSpPr>
+          <p:cNvPr id="7" name="Text 5"/>
+          <p:cNvSpPr/>
+          <p:nvPr/>
+        </p:nvSpPr>
+        <p:spPr>
+          <a:xfrm>
+            <a:off x="274320" y="6720840"/>
+            <a:ext cx="2743200" cy="137160"/>
+          </a:xfrm>
+          <a:prstGeom prst="rect">
+            <a:avLst/>
+          </a:prstGeom>
+          <a:noFill/>
+          <a:ln/>
+        </p:spPr>
+        <p:txBody>
+          <a:bodyPr wrap="square" rtlCol="0" anchor="ctr"/>
+          <a:lstStyle/>
+          <a:p>
+            <a:pPr indent="0" marL="0">
+              <a:buNone/>
+            </a:pPr>
+            <a:r>
+              <a:rPr lang="en-US" sz="1000" dirty="0">
+                <a:solidFill>
+                  <a:srgbClr val="6B7280"/>
+                </a:solidFill>
+                <a:latin typeface="Calibri" pitchFamily="34" charset="0"/>
+                <a:ea typeface="Calibri" pitchFamily="34" charset="-122"/>
+                <a:cs typeface="Calibri" pitchFamily="34" charset="-120"/>
+              </a:rPr>
+              <a:t>Creatives Takeover</a:t>
+            </a:r>
+            <a:endParaRPr lang="en-US" sz="1000" dirty="0"/>
+          </a:p>
+        </p:txBody>
+      </p:sp>
+      <p:sp>
+        <p:nvSpPr>
+          <p:cNvPr id="8" name="Text 6"/>
+          <p:cNvSpPr/>
+          <p:nvPr/>
+        </p:nvSpPr>
+        <p:spPr>
+          <a:xfrm>
+            <a:off x="8412480" y="6720840"/>
+            <a:ext cx="274320" cy="137160"/>
+          </a:xfrm>
+          <a:prstGeom prst="rect">
+            <a:avLst/>
+          </a:prstGeom>
+          <a:noFill/>
+          <a:ln/>
+        </p:spPr>
+        <p:txBody>
+          <a:bodyPr wrap="square" rtlCol="0" anchor="ctr"/>
+          <a:lstStyle/>
+          <a:p>
+            <a:pPr algn="r" indent="0" marL="0">
+              <a:buNone/>
+            </a:pPr>
+            <a:r>
+              <a:rPr lang="en-US" sz="1000" dirty="0">
+                <a:solidFill>
+                  <a:srgbClr val="6B7280"/>
+                </a:solidFill>
+                <a:latin typeface="Calibri" pitchFamily="34" charset="0"/>
+                <a:ea typeface="Calibri" pitchFamily="34" charset="-122"/>
+                <a:cs typeface="Calibri" pitchFamily="34" charset="-120"/>
+              </a:rPr>
+              <a:t>7</a:t>
+            </a:r>
+            <a:endParaRPr lang="en-US" sz="1000" dirty="0"/>
           </a:p>
         </p:txBody>
       </p:sp>
@@ -3524,9 +5009,16 @@
 </p:sld>
 </file>
 
-<file path=ppt/slides/slide7.xml><?xml version="1.0" encoding="utf-8"?>
+<file path=ppt/slides/slide8.xml><?xml version="1.0" encoding="utf-8"?>
 <p:sld xmlns:a="http://schemas.openxmlformats.org/drawingml/2006/main" xmlns:r="http://schemas.openxmlformats.org/officeDocument/2006/relationships" xmlns:p="http://schemas.openxmlformats.org/presentationml/2006/main">
-  <p:cSld name="Slide 7">
+  <p:cSld name="Slide 8">
+    <p:bg>
+      <p:bgPr>
+        <a:solidFill>
+          <a:srgbClr val="FFFFFF"/>
+        </a:solidFill>
+      </p:bgPr>
+    </p:bg>
     <p:spTree>
       <p:nvGrpSpPr>
         <p:cNvPr id="1" name=""/>
@@ -3543,14 +5035,34 @@
       </p:grpSpPr>
       <p:sp>
         <p:nvSpPr>
-          <p:cNvPr id="2" name="Text 0"/>
-          <p:cNvSpPr/>
-          <p:nvPr/>
-        </p:nvSpPr>
-        <p:spPr>
-          <a:xfrm>
-            <a:off x="457200" y="457200"/>
-            <a:ext cx="8229600" cy="685800"/>
+          <p:cNvPr id="2" name="Shape 0"/>
+          <p:cNvSpPr/>
+          <p:nvPr/>
+        </p:nvSpPr>
+        <p:spPr>
+          <a:xfrm>
+            <a:off x="0" y="0"/>
+            <a:ext cx="9144000" cy="137160"/>
+          </a:xfrm>
+          <a:prstGeom prst="rect">
+            <a:avLst/>
+          </a:prstGeom>
+          <a:solidFill>
+            <a:srgbClr val="0B1437"/>
+          </a:solidFill>
+          <a:ln/>
+        </p:spPr>
+      </p:sp>
+      <p:sp>
+        <p:nvSpPr>
+          <p:cNvPr id="3" name="Text 1"/>
+          <p:cNvSpPr/>
+          <p:nvPr/>
+        </p:nvSpPr>
+        <p:spPr>
+          <a:xfrm>
+            <a:off x="457200" y="365760"/>
+            <a:ext cx="8229600" cy="548640"/>
           </a:xfrm>
           <a:prstGeom prst="rect">
             <a:avLst/>
@@ -3570,6 +5082,9 @@
                 <a:solidFill>
                   <a:srgbClr val="0B1437"/>
                 </a:solidFill>
+                <a:latin typeface="Calibri" pitchFamily="34" charset="0"/>
+                <a:ea typeface="Calibri" pitchFamily="34" charset="-122"/>
+                <a:cs typeface="Calibri" pitchFamily="34" charset="-120"/>
               </a:rPr>
               <a:t>Customer Proof</a:t>
             </a:r>
@@ -3579,7 +5094,46 @@
       </p:sp>
       <p:sp>
         <p:nvSpPr>
-          <p:cNvPr id="3" name="Text 1"/>
+          <p:cNvPr id="4" name="Text 2"/>
+          <p:cNvSpPr/>
+          <p:nvPr/>
+        </p:nvSpPr>
+        <p:spPr>
+          <a:xfrm>
+            <a:off x="457200" y="914400"/>
+            <a:ext cx="8229600" cy="365760"/>
+          </a:xfrm>
+          <a:prstGeom prst="rect">
+            <a:avLst/>
+          </a:prstGeom>
+          <a:noFill/>
+          <a:ln/>
+        </p:spPr>
+        <p:txBody>
+          <a:bodyPr wrap="square" rtlCol="0" anchor="ctr"/>
+          <a:lstStyle/>
+          <a:p>
+            <a:pPr indent="0" marL="0">
+              <a:buNone/>
+            </a:pPr>
+            <a:r>
+              <a:rPr lang="en-US" sz="1600" i="1" dirty="0">
+                <a:solidFill>
+                  <a:srgbClr val="6B7280"/>
+                </a:solidFill>
+                <a:latin typeface="Calibri" pitchFamily="34" charset="0"/>
+                <a:ea typeface="Calibri" pitchFamily="34" charset="-122"/>
+                <a:cs typeface="Calibri" pitchFamily="34" charset="-120"/>
+              </a:rPr>
+              <a:t>What customers are saying</a:t>
+            </a:r>
+            <a:endParaRPr lang="en-US" sz="1600" dirty="0"/>
+          </a:p>
+        </p:txBody>
+      </p:sp>
+      <p:sp>
+        <p:nvSpPr>
+          <p:cNvPr id="5" name="Text 3"/>
           <p:cNvSpPr/>
           <p:nvPr/>
         </p:nvSpPr>
@@ -3606,14 +5160,17 @@
               <a:buChar char="•"/>
             </a:pPr>
             <a:r>
-              <a:rPr lang="en-US" sz="1600" dirty="0">
-                <a:solidFill>
-                  <a:srgbClr val="374151"/>
-                </a:solidFill>
-              </a:rPr>
-              <a:t>Customer logos</a:t>
-            </a:r>
-            <a:endParaRPr lang="en-US" sz="1600" dirty="0"/>
+              <a:rPr lang="en-US" sz="1800" b="1" dirty="0">
+                <a:solidFill>
+                  <a:srgbClr val="10B981"/>
+                </a:solidFill>
+                <a:latin typeface="Calibri" pitchFamily="34" charset="0"/>
+                <a:ea typeface="Calibri" pitchFamily="34" charset="-122"/>
+                <a:cs typeface="Calibri" pitchFamily="34" charset="-120"/>
+              </a:rPr>
+              <a:t>"Saved me 20 hours per week. Worth every penny." - Sarah, Bakery Owner</a:t>
+            </a:r>
+            <a:endParaRPr lang="en-US" sz="1800" dirty="0"/>
           </a:p>
           <a:p>
             <a:pPr marL="342900" indent="-342900">
@@ -3624,14 +5181,17 @@
               <a:buChar char="•"/>
             </a:pPr>
             <a:r>
-              <a:rPr lang="en-US" sz="1600" dirty="0">
-                <a:solidFill>
-                  <a:srgbClr val="374151"/>
-                </a:solidFill>
-              </a:rPr>
-              <a:t>Case studies</a:t>
-            </a:r>
-            <a:endParaRPr lang="en-US" sz="1600" dirty="0"/>
+              <a:rPr lang="en-US" sz="1800" b="1" dirty="0">
+                <a:solidFill>
+                  <a:srgbClr val="10B981"/>
+                </a:solidFill>
+                <a:latin typeface="Calibri" pitchFamily="34" charset="0"/>
+                <a:ea typeface="Calibri" pitchFamily="34" charset="-122"/>
+                <a:cs typeface="Calibri" pitchFamily="34" charset="-120"/>
+              </a:rPr>
+              <a:t>"Got paid 2x faster than before. Game changer." - Mike, Consultant</a:t>
+            </a:r>
+            <a:endParaRPr lang="en-US" sz="1800" dirty="0"/>
           </a:p>
           <a:p>
             <a:pPr marL="342900" indent="-342900">
@@ -3642,14 +5202,17 @@
               <a:buChar char="•"/>
             </a:pPr>
             <a:r>
-              <a:rPr lang="en-US" sz="1600" dirty="0">
-                <a:solidFill>
-                  <a:srgbClr val="374151"/>
-                </a:solidFill>
-              </a:rPr>
-              <a:t>Testimonials</a:t>
-            </a:r>
-            <a:endParaRPr lang="en-US" sz="1600" dirty="0"/>
+              <a:rPr lang="en-US" sz="1800" b="1" dirty="0">
+                <a:solidFill>
+                  <a:srgbClr val="1F2937"/>
+                </a:solidFill>
+                <a:latin typeface="Calibri" pitchFamily="34" charset="0"/>
+                <a:ea typeface="Calibri" pitchFamily="34" charset="-122"/>
+                <a:cs typeface="Calibri" pitchFamily="34" charset="-120"/>
+              </a:rPr>
+              <a:t>4.8/5 star average rating across 500+ reviews</a:t>
+            </a:r>
+            <a:endParaRPr lang="en-US" sz="1800" dirty="0"/>
           </a:p>
           <a:p>
             <a:pPr marL="342900" indent="-342900">
@@ -3660,14 +5223,115 @@
               <a:buChar char="•"/>
             </a:pPr>
             <a:r>
-              <a:rPr lang="en-US" sz="1600" dirty="0">
-                <a:solidFill>
-                  <a:srgbClr val="374151"/>
-                </a:solidFill>
-              </a:rPr>
-              <a:t>Usage statistics</a:t>
-            </a:r>
-            <a:endParaRPr lang="en-US" sz="1600" dirty="0"/>
+              <a:rPr lang="en-US" sz="1800" b="1" dirty="0">
+                <a:solidFill>
+                  <a:srgbClr val="1F2937"/>
+                </a:solidFill>
+                <a:latin typeface="Calibri" pitchFamily="34" charset="0"/>
+                <a:ea typeface="Calibri" pitchFamily="34" charset="-122"/>
+                <a:cs typeface="Calibri" pitchFamily="34" charset="-120"/>
+              </a:rPr>
+              <a:t>92% of customers recommend us to peers</a:t>
+            </a:r>
+            <a:endParaRPr lang="en-US" sz="1800" dirty="0"/>
+          </a:p>
+        </p:txBody>
+      </p:sp>
+      <p:sp>
+        <p:nvSpPr>
+          <p:cNvPr id="6" name="Shape 4"/>
+          <p:cNvSpPr/>
+          <p:nvPr/>
+        </p:nvSpPr>
+        <p:spPr>
+          <a:xfrm>
+            <a:off x="0" y="6720840"/>
+            <a:ext cx="73152" cy="137160"/>
+          </a:xfrm>
+          <a:prstGeom prst="rect">
+            <a:avLst/>
+          </a:prstGeom>
+          <a:solidFill>
+            <a:srgbClr val="38BDF8"/>
+          </a:solidFill>
+          <a:ln/>
+        </p:spPr>
+      </p:sp>
+      <p:sp>
+        <p:nvSpPr>
+          <p:cNvPr id="7" name="Text 5"/>
+          <p:cNvSpPr/>
+          <p:nvPr/>
+        </p:nvSpPr>
+        <p:spPr>
+          <a:xfrm>
+            <a:off x="274320" y="6720840"/>
+            <a:ext cx="2743200" cy="137160"/>
+          </a:xfrm>
+          <a:prstGeom prst="rect">
+            <a:avLst/>
+          </a:prstGeom>
+          <a:noFill/>
+          <a:ln/>
+        </p:spPr>
+        <p:txBody>
+          <a:bodyPr wrap="square" rtlCol="0" anchor="ctr"/>
+          <a:lstStyle/>
+          <a:p>
+            <a:pPr indent="0" marL="0">
+              <a:buNone/>
+            </a:pPr>
+            <a:r>
+              <a:rPr lang="en-US" sz="1000" dirty="0">
+                <a:solidFill>
+                  <a:srgbClr val="6B7280"/>
+                </a:solidFill>
+                <a:latin typeface="Calibri" pitchFamily="34" charset="0"/>
+                <a:ea typeface="Calibri" pitchFamily="34" charset="-122"/>
+                <a:cs typeface="Calibri" pitchFamily="34" charset="-120"/>
+              </a:rPr>
+              <a:t>Creatives Takeover</a:t>
+            </a:r>
+            <a:endParaRPr lang="en-US" sz="1000" dirty="0"/>
+          </a:p>
+        </p:txBody>
+      </p:sp>
+      <p:sp>
+        <p:nvSpPr>
+          <p:cNvPr id="8" name="Text 6"/>
+          <p:cNvSpPr/>
+          <p:nvPr/>
+        </p:nvSpPr>
+        <p:spPr>
+          <a:xfrm>
+            <a:off x="8412480" y="6720840"/>
+            <a:ext cx="274320" cy="137160"/>
+          </a:xfrm>
+          <a:prstGeom prst="rect">
+            <a:avLst/>
+          </a:prstGeom>
+          <a:noFill/>
+          <a:ln/>
+        </p:spPr>
+        <p:txBody>
+          <a:bodyPr wrap="square" rtlCol="0" anchor="ctr"/>
+          <a:lstStyle/>
+          <a:p>
+            <a:pPr algn="r" indent="0" marL="0">
+              <a:buNone/>
+            </a:pPr>
+            <a:r>
+              <a:rPr lang="en-US" sz="1000" dirty="0">
+                <a:solidFill>
+                  <a:srgbClr val="6B7280"/>
+                </a:solidFill>
+                <a:latin typeface="Calibri" pitchFamily="34" charset="0"/>
+                <a:ea typeface="Calibri" pitchFamily="34" charset="-122"/>
+                <a:cs typeface="Calibri" pitchFamily="34" charset="-120"/>
+              </a:rPr>
+              <a:t>8</a:t>
+            </a:r>
+            <a:endParaRPr lang="en-US" sz="1000" dirty="0"/>
           </a:p>
         </p:txBody>
       </p:sp>
@@ -3679,9 +5343,16 @@
 </p:sld>
 </file>
 
-<file path=ppt/slides/slide8.xml><?xml version="1.0" encoding="utf-8"?>
+<file path=ppt/slides/slide9.xml><?xml version="1.0" encoding="utf-8"?>
 <p:sld xmlns:a="http://schemas.openxmlformats.org/drawingml/2006/main" xmlns:r="http://schemas.openxmlformats.org/officeDocument/2006/relationships" xmlns:p="http://schemas.openxmlformats.org/presentationml/2006/main">
-  <p:cSld name="Slide 8">
+  <p:cSld name="Slide 9">
+    <p:bg>
+      <p:bgPr>
+        <a:solidFill>
+          <a:srgbClr val="FFFFFF"/>
+        </a:solidFill>
+      </p:bgPr>
+    </p:bg>
     <p:spTree>
       <p:nvGrpSpPr>
         <p:cNvPr id="1" name=""/>
@@ -3698,14 +5369,34 @@
       </p:grpSpPr>
       <p:sp>
         <p:nvSpPr>
-          <p:cNvPr id="2" name="Text 0"/>
-          <p:cNvSpPr/>
-          <p:nvPr/>
-        </p:nvSpPr>
-        <p:spPr>
-          <a:xfrm>
-            <a:off x="457200" y="457200"/>
-            <a:ext cx="8229600" cy="685800"/>
+          <p:cNvPr id="2" name="Shape 0"/>
+          <p:cNvSpPr/>
+          <p:nvPr/>
+        </p:nvSpPr>
+        <p:spPr>
+          <a:xfrm>
+            <a:off x="0" y="0"/>
+            <a:ext cx="9144000" cy="137160"/>
+          </a:xfrm>
+          <a:prstGeom prst="rect">
+            <a:avLst/>
+          </a:prstGeom>
+          <a:solidFill>
+            <a:srgbClr val="0B1437"/>
+          </a:solidFill>
+          <a:ln/>
+        </p:spPr>
+      </p:sp>
+      <p:sp>
+        <p:nvSpPr>
+          <p:cNvPr id="3" name="Text 1"/>
+          <p:cNvSpPr/>
+          <p:nvPr/>
+        </p:nvSpPr>
+        <p:spPr>
+          <a:xfrm>
+            <a:off x="457200" y="365760"/>
+            <a:ext cx="8229600" cy="548640"/>
           </a:xfrm>
           <a:prstGeom prst="rect">
             <a:avLst/>
@@ -3725,8 +5416,11 @@
                 <a:solidFill>
                   <a:srgbClr val="0B1437"/>
                 </a:solidFill>
-              </a:rPr>
-              <a:t>Market</a:t>
+                <a:latin typeface="Calibri" pitchFamily="34" charset="0"/>
+                <a:ea typeface="Calibri" pitchFamily="34" charset="-122"/>
+                <a:cs typeface="Calibri" pitchFamily="34" charset="-120"/>
+              </a:rPr>
+              <a:t>Competition</a:t>
             </a:r>
             <a:endParaRPr lang="en-US" sz="3200" dirty="0"/>
           </a:p>
@@ -3734,7 +5428,46 @@
       </p:sp>
       <p:sp>
         <p:nvSpPr>
-          <p:cNvPr id="3" name="Text 1"/>
+          <p:cNvPr id="4" name="Text 2"/>
+          <p:cNvSpPr/>
+          <p:nvPr/>
+        </p:nvSpPr>
+        <p:spPr>
+          <a:xfrm>
+            <a:off x="457200" y="914400"/>
+            <a:ext cx="8229600" cy="365760"/>
+          </a:xfrm>
+          <a:prstGeom prst="rect">
+            <a:avLst/>
+          </a:prstGeom>
+          <a:noFill/>
+          <a:ln/>
+        </p:spPr>
+        <p:txBody>
+          <a:bodyPr wrap="square" rtlCol="0" anchor="ctr"/>
+          <a:lstStyle/>
+          <a:p>
+            <a:pPr indent="0" marL="0">
+              <a:buNone/>
+            </a:pPr>
+            <a:r>
+              <a:rPr lang="en-US" sz="1600" i="1" dirty="0">
+                <a:solidFill>
+                  <a:srgbClr val="6B7280"/>
+                </a:solidFill>
+                <a:latin typeface="Calibri" pitchFamily="34" charset="0"/>
+                <a:ea typeface="Calibri" pitchFamily="34" charset="-122"/>
+                <a:cs typeface="Calibri" pitchFamily="34" charset="-120"/>
+              </a:rPr>
+              <a:t>Why we win</a:t>
+            </a:r>
+            <a:endParaRPr lang="en-US" sz="1600" dirty="0"/>
+          </a:p>
+        </p:txBody>
+      </p:sp>
+      <p:sp>
+        <p:nvSpPr>
+          <p:cNvPr id="5" name="Text 3"/>
           <p:cNvSpPr/>
           <p:nvPr/>
         </p:nvSpPr>
@@ -3761,14 +5494,17 @@
               <a:buChar char="•"/>
             </a:pPr>
             <a:r>
-              <a:rPr lang="en-US" sz="1600" dirty="0">
-                <a:solidFill>
-                  <a:srgbClr val="374151"/>
-                </a:solidFill>
-              </a:rPr>
-              <a:t>TAM/SAM/SOM</a:t>
-            </a:r>
-            <a:endParaRPr lang="en-US" sz="1600" dirty="0"/>
+              <a:rPr lang="en-US" sz="1800" b="1" dirty="0">
+                <a:solidFill>
+                  <a:srgbClr val="1F2937"/>
+                </a:solidFill>
+                <a:latin typeface="Calibri" pitchFamily="34" charset="0"/>
+                <a:ea typeface="Calibri" pitchFamily="34" charset="-122"/>
+                <a:cs typeface="Calibri" pitchFamily="34" charset="-120"/>
+              </a:rPr>
+              <a:t>Competitors are either too expensive (enterprise) or too basic (freelancer tools)</a:t>
+            </a:r>
+            <a:endParaRPr lang="en-US" sz="1800" dirty="0"/>
           </a:p>
           <a:p>
             <a:pPr marL="342900" indent="-342900">
@@ -3779,14 +5515,17 @@
               <a:buChar char="•"/>
             </a:pPr>
             <a:r>
-              <a:rPr lang="en-US" sz="1600" dirty="0">
-                <a:solidFill>
-                  <a:srgbClr val="374151"/>
-                </a:solidFill>
-              </a:rPr>
-              <a:t>Market trends</a:t>
-            </a:r>
-            <a:endParaRPr lang="en-US" sz="1600" dirty="0"/>
+              <a:rPr lang="en-US" sz="1800" b="1" dirty="0">
+                <a:solidFill>
+                  <a:srgbClr val="1F2937"/>
+                </a:solidFill>
+                <a:latin typeface="Calibri" pitchFamily="34" charset="0"/>
+                <a:ea typeface="Calibri" pitchFamily="34" charset="-122"/>
+                <a:cs typeface="Calibri" pitchFamily="34" charset="-120"/>
+              </a:rPr>
+              <a:t>We're the only solution built specifically for small businesses</a:t>
+            </a:r>
+            <a:endParaRPr lang="en-US" sz="1800" dirty="0"/>
           </a:p>
           <a:p>
             <a:pPr marL="342900" indent="-342900">
@@ -3797,98 +5536,18 @@
               <a:buChar char="•"/>
             </a:pPr>
             <a:r>
-              <a:rPr lang="en-US" sz="1600" dirty="0">
-                <a:solidFill>
-                  <a:srgbClr val="374151"/>
-                </a:solidFill>
-              </a:rPr>
-              <a:t>Growth drivers</a:t>
-            </a:r>
-            <a:endParaRPr lang="en-US" sz="1600" dirty="0"/>
-          </a:p>
-        </p:txBody>
-      </p:sp>
-    </p:spTree>
-  </p:cSld>
-  <p:clrMapOvr>
-    <a:masterClrMapping/>
-  </p:clrMapOvr>
-</p:sld>
-</file>
-
-<file path=ppt/slides/slide9.xml><?xml version="1.0" encoding="utf-8"?>
-<p:sld xmlns:a="http://schemas.openxmlformats.org/drawingml/2006/main" xmlns:r="http://schemas.openxmlformats.org/officeDocument/2006/relationships" xmlns:p="http://schemas.openxmlformats.org/presentationml/2006/main">
-  <p:cSld name="Slide 9">
-    <p:spTree>
-      <p:nvGrpSpPr>
-        <p:cNvPr id="1" name=""/>
-        <p:cNvGrpSpPr/>
-        <p:nvPr/>
-      </p:nvGrpSpPr>
-      <p:grpSpPr>
-        <a:xfrm>
-          <a:off x="0" y="0"/>
-          <a:ext cx="0" cy="0"/>
-          <a:chOff x="0" y="0"/>
-          <a:chExt cx="0" cy="0"/>
-        </a:xfrm>
-      </p:grpSpPr>
-      <p:sp>
-        <p:nvSpPr>
-          <p:cNvPr id="2" name="Text 0"/>
-          <p:cNvSpPr/>
-          <p:nvPr/>
-        </p:nvSpPr>
-        <p:spPr>
-          <a:xfrm>
-            <a:off x="457200" y="457200"/>
-            <a:ext cx="8229600" cy="685800"/>
-          </a:xfrm>
-          <a:prstGeom prst="rect">
-            <a:avLst/>
-          </a:prstGeom>
-          <a:noFill/>
-          <a:ln/>
-        </p:spPr>
-        <p:txBody>
-          <a:bodyPr wrap="square" rtlCol="0" anchor="ctr"/>
-          <a:lstStyle/>
-          <a:p>
-            <a:pPr indent="0" marL="0">
-              <a:buNone/>
-            </a:pPr>
-            <a:r>
-              <a:rPr lang="en-US" sz="3200" b="1" dirty="0">
-                <a:solidFill>
-                  <a:srgbClr val="0B1437"/>
-                </a:solidFill>
-              </a:rPr>
-              <a:t>Product Deep Dive</a:t>
-            </a:r>
-            <a:endParaRPr lang="en-US" sz="3200" dirty="0"/>
-          </a:p>
-        </p:txBody>
-      </p:sp>
-      <p:sp>
-        <p:nvSpPr>
-          <p:cNvPr id="3" name="Text 1"/>
-          <p:cNvSpPr/>
-          <p:nvPr/>
-        </p:nvSpPr>
-        <p:spPr>
-          <a:xfrm>
-            <a:off x="457200" y="1371600"/>
-            <a:ext cx="8229600" cy="4114800"/>
-          </a:xfrm>
-          <a:prstGeom prst="rect">
-            <a:avLst/>
-          </a:prstGeom>
-          <a:noFill/>
-          <a:ln/>
-        </p:spPr>
-        <p:txBody>
-          <a:bodyPr wrap="square" rtlCol="0" anchor="ctr"/>
-          <a:lstStyle/>
+              <a:rPr lang="en-US" sz="1800" b="1" dirty="0">
+                <a:solidFill>
+                  <a:srgbClr val="1F2937"/>
+                </a:solidFill>
+                <a:latin typeface="Calibri" pitchFamily="34" charset="0"/>
+                <a:ea typeface="Calibri" pitchFamily="34" charset="-122"/>
+                <a:cs typeface="Calibri" pitchFamily="34" charset="-120"/>
+              </a:rPr>
+              <a:t>AI-powered features that competitors lack</a:t>
+            </a:r>
+            <a:endParaRPr lang="en-US" sz="1800" dirty="0"/>
+          </a:p>
           <a:p>
             <a:pPr marL="342900" indent="-342900">
               <a:lnSpc>
@@ -3898,50 +5557,115 @@
               <a:buChar char="•"/>
             </a:pPr>
             <a:r>
-              <a:rPr lang="en-US" sz="1600" dirty="0">
-                <a:solidFill>
-                  <a:srgbClr val="374151"/>
-                </a:solidFill>
-              </a:rPr>
-              <a:t>Product walkthrough</a:t>
-            </a:r>
-            <a:endParaRPr lang="en-US" sz="1600" dirty="0"/>
-          </a:p>
-          <a:p>
-            <a:pPr marL="342900" indent="-342900">
-              <a:lnSpc>
-                <a:spcPts val="2800"/>
-              </a:lnSpc>
-              <a:buSzPct val="100000"/>
-              <a:buChar char="•"/>
-            </a:pPr>
-            <a:r>
-              <a:rPr lang="en-US" sz="1600" dirty="0">
-                <a:solidFill>
-                  <a:srgbClr val="374151"/>
-                </a:solidFill>
-              </a:rPr>
-              <a:t>Key features</a:t>
-            </a:r>
-            <a:endParaRPr lang="en-US" sz="1600" dirty="0"/>
-          </a:p>
-          <a:p>
-            <a:pPr marL="342900" indent="-342900">
-              <a:lnSpc>
-                <a:spcPts val="2800"/>
-              </a:lnSpc>
-              <a:buSzPct val="100000"/>
-              <a:buChar char="•"/>
-            </a:pPr>
-            <a:r>
-              <a:rPr lang="en-US" sz="1600" dirty="0">
-                <a:solidFill>
-                  <a:srgbClr val="374151"/>
-                </a:solidFill>
-              </a:rPr>
-              <a:t>Technology moat</a:t>
-            </a:r>
-            <a:endParaRPr lang="en-US" sz="1600" dirty="0"/>
+              <a:rPr lang="en-US" sz="1800" b="1" dirty="0">
+                <a:solidFill>
+                  <a:srgbClr val="1F2937"/>
+                </a:solidFill>
+                <a:latin typeface="Calibri" pitchFamily="34" charset="0"/>
+                <a:ea typeface="Calibri" pitchFamily="34" charset="-122"/>
+                <a:cs typeface="Calibri" pitchFamily="34" charset="-120"/>
+              </a:rPr>
+              <a:t>Better pricing with superior features</a:t>
+            </a:r>
+            <a:endParaRPr lang="en-US" sz="1800" dirty="0"/>
+          </a:p>
+        </p:txBody>
+      </p:sp>
+      <p:sp>
+        <p:nvSpPr>
+          <p:cNvPr id="6" name="Shape 4"/>
+          <p:cNvSpPr/>
+          <p:nvPr/>
+        </p:nvSpPr>
+        <p:spPr>
+          <a:xfrm>
+            <a:off x="0" y="6720840"/>
+            <a:ext cx="73152" cy="137160"/>
+          </a:xfrm>
+          <a:prstGeom prst="rect">
+            <a:avLst/>
+          </a:prstGeom>
+          <a:solidFill>
+            <a:srgbClr val="38BDF8"/>
+          </a:solidFill>
+          <a:ln/>
+        </p:spPr>
+      </p:sp>
+      <p:sp>
+        <p:nvSpPr>
+          <p:cNvPr id="7" name="Text 5"/>
+          <p:cNvSpPr/>
+          <p:nvPr/>
+        </p:nvSpPr>
+        <p:spPr>
+          <a:xfrm>
+            <a:off x="274320" y="6720840"/>
+            <a:ext cx="2743200" cy="137160"/>
+          </a:xfrm>
+          <a:prstGeom prst="rect">
+            <a:avLst/>
+          </a:prstGeom>
+          <a:noFill/>
+          <a:ln/>
+        </p:spPr>
+        <p:txBody>
+          <a:bodyPr wrap="square" rtlCol="0" anchor="ctr"/>
+          <a:lstStyle/>
+          <a:p>
+            <a:pPr indent="0" marL="0">
+              <a:buNone/>
+            </a:pPr>
+            <a:r>
+              <a:rPr lang="en-US" sz="1000" dirty="0">
+                <a:solidFill>
+                  <a:srgbClr val="6B7280"/>
+                </a:solidFill>
+                <a:latin typeface="Calibri" pitchFamily="34" charset="0"/>
+                <a:ea typeface="Calibri" pitchFamily="34" charset="-122"/>
+                <a:cs typeface="Calibri" pitchFamily="34" charset="-120"/>
+              </a:rPr>
+              <a:t>Creatives Takeover</a:t>
+            </a:r>
+            <a:endParaRPr lang="en-US" sz="1000" dirty="0"/>
+          </a:p>
+        </p:txBody>
+      </p:sp>
+      <p:sp>
+        <p:nvSpPr>
+          <p:cNvPr id="8" name="Text 6"/>
+          <p:cNvSpPr/>
+          <p:nvPr/>
+        </p:nvSpPr>
+        <p:spPr>
+          <a:xfrm>
+            <a:off x="8412480" y="6720840"/>
+            <a:ext cx="274320" cy="137160"/>
+          </a:xfrm>
+          <a:prstGeom prst="rect">
+            <a:avLst/>
+          </a:prstGeom>
+          <a:noFill/>
+          <a:ln/>
+        </p:spPr>
+        <p:txBody>
+          <a:bodyPr wrap="square" rtlCol="0" anchor="ctr"/>
+          <a:lstStyle/>
+          <a:p>
+            <a:pPr algn="r" indent="0" marL="0">
+              <a:buNone/>
+            </a:pPr>
+            <a:r>
+              <a:rPr lang="en-US" sz="1000" dirty="0">
+                <a:solidFill>
+                  <a:srgbClr val="6B7280"/>
+                </a:solidFill>
+                <a:latin typeface="Calibri" pitchFamily="34" charset="0"/>
+                <a:ea typeface="Calibri" pitchFamily="34" charset="-122"/>
+                <a:cs typeface="Calibri" pitchFamily="34" charset="-120"/>
+              </a:rPr>
+              <a:t>9</a:t>
+            </a:r>
+            <a:endParaRPr lang="en-US" sz="1000" dirty="0"/>
           </a:p>
         </p:txBody>
       </p:sp>
